--- a/public/fun/cards/creative/creative-16.pptx
+++ b/public/fun/cards/creative/creative-16.pptx
@@ -3099,111 +3099,14 @@
       <p:grpSpPr/>
       <p:sp>
         <p:nvSpPr>
-          <p:cNvPr id="2" name="Rectangle 1"/>
-          <p:cNvSpPr/>
+          <p:cNvPr id="2" name="텍스트"/>
+          <p:cNvSpPr txBox="1"/>
           <p:nvPr/>
         </p:nvSpPr>
         <p:spPr>
           <a:xfrm>
-            <a:off x="0" y="1339200"/>
-            <a:ext cx="3240000" cy="460800"/>
-          </a:xfrm>
-          <a:prstGeom prst="rect">
-            <a:avLst/>
-          </a:prstGeom>
-          <a:solidFill>
-            <a:srgbClr val="5A7887"/>
-          </a:solidFill>
-          <a:ln>
-            <a:noFill/>
-          </a:ln>
-        </p:spPr>
-        <p:txBody>
-          <a:bodyPr rtlCol="0" anchor="ctr"/>
-          <a:lstStyle/>
-          <a:p>
-            <a:pPr algn="ctr"/>
-          </a:p>
-        </p:txBody>
-      </p:sp>
-      <p:sp>
-        <p:nvSpPr>
-          <p:cNvPr id="3" name="Freeform 2"/>
-          <p:cNvSpPr/>
-          <p:nvPr/>
-        </p:nvSpPr>
-        <p:spPr>
-          <a:xfrm>
-            <a:off x="2706756" y="249840"/>
-            <a:ext cx="346488" cy="329531"/>
-          </a:xfrm>
-          <a:custGeom>
-            <a:avLst/>
-            <a:gdLst/>
-            <a:ahLst/>
-            <a:cxnLst/>
-            <a:rect l="l" t="t" r="r" b="b"/>
-            <a:pathLst>
-              <a:path w="346488" h="329531">
-                <a:moveTo>
-                  <a:pt x="173244" y="0"/>
-                </a:moveTo>
-                <a:lnTo>
-                  <a:pt x="217469" y="121290"/>
-                </a:lnTo>
-                <a:lnTo>
-                  <a:pt x="346488" y="125869"/>
-                </a:lnTo>
-                <a:lnTo>
-                  <a:pt x="244801" y="205410"/>
-                </a:lnTo>
-                <a:lnTo>
-                  <a:pt x="280315" y="329531"/>
-                </a:lnTo>
-                <a:lnTo>
-                  <a:pt x="173244" y="257400"/>
-                </a:lnTo>
-                <a:lnTo>
-                  <a:pt x="66173" y="329531"/>
-                </a:lnTo>
-                <a:lnTo>
-                  <a:pt x="101687" y="205410"/>
-                </a:lnTo>
-                <a:lnTo>
-                  <a:pt x="0" y="125869"/>
-                </a:lnTo>
-                <a:lnTo>
-                  <a:pt x="129019" y="121290"/>
-                </a:lnTo>
-                <a:close/>
-              </a:path>
-            </a:pathLst>
-          </a:custGeom>
-          <a:solidFill>
-            <a:srgbClr val="5A7887"/>
-          </a:solidFill>
-          <a:ln>
-            <a:noFill/>
-          </a:ln>
-        </p:spPr>
-        <p:txBody>
-          <a:bodyPr rtlCol="0" anchor="ctr"/>
-          <a:lstStyle/>
-          <a:p>
-            <a:pPr algn="ctr"/>
-          </a:p>
-        </p:txBody>
-      </p:sp>
-      <p:sp>
-        <p:nvSpPr>
-          <p:cNvPr id="4" name="텍스트"/>
-          <p:cNvSpPr txBox="1"/>
-          <p:nvPr/>
-        </p:nvSpPr>
-        <p:spPr>
-          <a:xfrm>
-            <a:off x="216000" y="230400"/>
-            <a:ext cx="2160000" cy="313692"/>
+            <a:off x="1584000" y="36000"/>
+            <a:ext cx="1656000" cy="1728000"/>
           </a:xfrm>
           <a:prstGeom prst="rect">
             <a:avLst/>
@@ -3211,39 +3114,39 @@
           <a:noFill/>
         </p:spPr>
         <p:txBody>
-          <a:bodyPr wrap="square" lIns="0" rIns="0" tIns="0" bIns="0" anchor="t">
+          <a:bodyPr wrap="square" lIns="0" rIns="0" tIns="0" bIns="0" anchor="ctr">
             <a:spAutoFit/>
           </a:bodyPr>
           <a:lstStyle/>
           <a:p>
-            <a:pPr algn="l">
+            <a:pPr algn="ctr">
               <a:lnSpc>
-                <a:spcPts val="2755"/>
+                <a:spcPts val="18560"/>
               </a:lnSpc>
             </a:pPr>
             <a:r>
-              <a:rPr sz="1900" b="1" spc="50">
+              <a:rPr sz="12800" b="1">
                 <a:solidFill>
-                  <a:srgbClr val="314149"/>
+                  <a:srgbClr val="FFF1EA"/>
                 </a:solidFill>
                 <a:latin typeface="맑은 고딕"/>
                 <a:ea typeface="맑은 고딕"/>
               </a:rPr>
-              <a:t>황주원</a:t>
-            </a:r>
-          </a:p>
-        </p:txBody>
-      </p:sp>
-      <p:sp>
-        <p:nvSpPr>
-          <p:cNvPr id="5" name="텍스트"/>
+              <a:t>황</a:t>
+            </a:r>
+          </a:p>
+        </p:txBody>
+      </p:sp>
+      <p:sp>
+        <p:nvSpPr>
+          <p:cNvPr id="3" name="텍스트"/>
           <p:cNvSpPr txBox="1"/>
           <p:nvPr/>
         </p:nvSpPr>
         <p:spPr>
           <a:xfrm>
-            <a:off x="216000" y="525600"/>
-            <a:ext cx="2160000" cy="122400"/>
+            <a:off x="252000" y="223200"/>
+            <a:ext cx="1440000" cy="133351"/>
           </a:xfrm>
           <a:prstGeom prst="rect">
             <a:avLst/>
@@ -3258,32 +3161,32 @@
           <a:p>
             <a:pPr algn="l">
               <a:lnSpc>
-                <a:spcPts val="1232"/>
+                <a:spcPts val="1015"/>
               </a:lnSpc>
             </a:pPr>
             <a:r>
-              <a:rPr sz="850" b="1">
+              <a:rPr sz="700" b="1" spc="200">
                 <a:solidFill>
-                  <a:srgbClr val="5A7887"/>
+                  <a:srgbClr val="6B7280"/>
                 </a:solidFill>
                 <a:latin typeface="맑은 고딕"/>
                 <a:ea typeface="맑은 고딕"/>
               </a:rPr>
-              <a:t>모션 그래픽 디자이너</a:t>
-            </a:r>
-          </a:p>
-        </p:txBody>
-      </p:sp>
-      <p:sp>
-        <p:nvSpPr>
-          <p:cNvPr id="6" name="텍스트"/>
+              <a:t>스튜디오 이름</a:t>
+            </a:r>
+          </a:p>
+        </p:txBody>
+      </p:sp>
+      <p:sp>
+        <p:nvSpPr>
+          <p:cNvPr id="4" name="텍스트"/>
           <p:cNvSpPr txBox="1"/>
           <p:nvPr/>
         </p:nvSpPr>
         <p:spPr>
           <a:xfrm>
-            <a:off x="216000" y="770400"/>
-            <a:ext cx="2160000" cy="100800"/>
+            <a:off x="252000" y="604800"/>
+            <a:ext cx="1656000" cy="360000"/>
           </a:xfrm>
           <a:prstGeom prst="rect">
             <a:avLst/>
@@ -3298,32 +3201,32 @@
           <a:p>
             <a:pPr algn="l">
               <a:lnSpc>
-                <a:spcPts val="1087"/>
+                <a:spcPts val="3190"/>
               </a:lnSpc>
             </a:pPr>
             <a:r>
-              <a:rPr sz="750" b="1" spc="150">
+              <a:rPr sz="2200" b="1">
                 <a:solidFill>
-                  <a:srgbClr val="6D777B"/>
+                  <a:srgbClr val="12151C"/>
                 </a:solidFill>
                 <a:latin typeface="맑은 고딕"/>
                 <a:ea typeface="맑은 고딕"/>
               </a:rPr>
-              <a:t>스튜디오 이름</a:t>
-            </a:r>
-          </a:p>
-        </p:txBody>
-      </p:sp>
-      <p:sp>
-        <p:nvSpPr>
-          <p:cNvPr id="7" name="텍스트"/>
+              <a:t>황주원</a:t>
+            </a:r>
+          </a:p>
+        </p:txBody>
+      </p:sp>
+      <p:sp>
+        <p:nvSpPr>
+          <p:cNvPr id="5" name="텍스트"/>
           <p:cNvSpPr txBox="1"/>
           <p:nvPr/>
         </p:nvSpPr>
         <p:spPr>
           <a:xfrm>
-            <a:off x="216000" y="1432800"/>
-            <a:ext cx="122400" cy="108000"/>
+            <a:off x="252000" y="1008000"/>
+            <a:ext cx="1656000" cy="171451"/>
           </a:xfrm>
           <a:prstGeom prst="rect">
             <a:avLst/>
@@ -3338,32 +3241,61 @@
           <a:p>
             <a:pPr algn="l">
               <a:lnSpc>
-                <a:spcPts val="1015"/>
+                <a:spcPts val="1305"/>
               </a:lnSpc>
             </a:pPr>
             <a:r>
-              <a:rPr sz="700" b="1">
+              <a:rPr sz="900" b="0">
                 <a:solidFill>
-                  <a:srgbClr val="FFFFFF"/>
+                  <a:srgbClr val="6B7280"/>
                 </a:solidFill>
                 <a:latin typeface="맑은 고딕"/>
                 <a:ea typeface="맑은 고딕"/>
               </a:rPr>
-              <a:t>T</a:t>
-            </a:r>
-          </a:p>
-        </p:txBody>
-      </p:sp>
-      <p:sp>
-        <p:nvSpPr>
-          <p:cNvPr id="8" name="텍스트"/>
+              <a:t>모션 그래픽 디자이너</a:t>
+            </a:r>
+          </a:p>
+        </p:txBody>
+      </p:sp>
+      <p:sp>
+        <p:nvSpPr>
+          <p:cNvPr id="6" name="Rectangle 5"/>
+          <p:cNvSpPr/>
+          <p:nvPr/>
+        </p:nvSpPr>
+        <p:spPr>
+          <a:xfrm>
+            <a:off x="252000" y="1231200"/>
+            <a:ext cx="144000" cy="18000"/>
+          </a:xfrm>
+          <a:prstGeom prst="rect">
+            <a:avLst/>
+          </a:prstGeom>
+          <a:solidFill>
+            <a:srgbClr val="FF9E6B"/>
+          </a:solidFill>
+          <a:ln>
+            <a:noFill/>
+          </a:ln>
+        </p:spPr>
+        <p:txBody>
+          <a:bodyPr rtlCol="0" anchor="ctr"/>
+          <a:lstStyle/>
+          <a:p>
+            <a:pPr algn="ctr"/>
+          </a:p>
+        </p:txBody>
+      </p:sp>
+      <p:sp>
+        <p:nvSpPr>
+          <p:cNvPr id="7" name="텍스트"/>
           <p:cNvSpPr txBox="1"/>
           <p:nvPr/>
         </p:nvSpPr>
         <p:spPr>
           <a:xfrm>
-            <a:off x="360000" y="1432800"/>
-            <a:ext cx="1368000" cy="108000"/>
+            <a:off x="252000" y="1350000"/>
+            <a:ext cx="331200" cy="99061"/>
           </a:xfrm>
           <a:prstGeom prst="rect">
             <a:avLst/>
@@ -3378,32 +3310,32 @@
           <a:p>
             <a:pPr algn="l">
               <a:lnSpc>
-                <a:spcPts val="1015"/>
+                <a:spcPts val="754"/>
               </a:lnSpc>
             </a:pPr>
             <a:r>
-              <a:rPr sz="700" b="0">
+              <a:rPr sz="520" b="1" spc="120">
                 <a:solidFill>
-                  <a:srgbClr val="FFFFFF"/>
+                  <a:srgbClr val="6B7280"/>
                 </a:solidFill>
                 <a:latin typeface="맑은 고딕"/>
                 <a:ea typeface="맑은 고딕"/>
               </a:rPr>
-              <a:t>010-1234-5678</a:t>
-            </a:r>
-          </a:p>
-        </p:txBody>
-      </p:sp>
-      <p:sp>
-        <p:nvSpPr>
-          <p:cNvPr id="9" name="텍스트"/>
+              <a:t>TEL</a:t>
+            </a:r>
+          </a:p>
+        </p:txBody>
+      </p:sp>
+      <p:sp>
+        <p:nvSpPr>
+          <p:cNvPr id="8" name="텍스트"/>
           <p:cNvSpPr txBox="1"/>
           <p:nvPr/>
         </p:nvSpPr>
         <p:spPr>
           <a:xfrm>
-            <a:off x="216000" y="1576800"/>
-            <a:ext cx="122400" cy="108000"/>
+            <a:off x="583200" y="1339200"/>
+            <a:ext cx="1296000" cy="129541"/>
           </a:xfrm>
           <a:prstGeom prst="rect">
             <a:avLst/>
@@ -3418,32 +3350,32 @@
           <a:p>
             <a:pPr algn="l">
               <a:lnSpc>
-                <a:spcPts val="1015"/>
+                <a:spcPts val="986"/>
               </a:lnSpc>
             </a:pPr>
             <a:r>
-              <a:rPr sz="700" b="1">
+              <a:rPr sz="680" b="0">
                 <a:solidFill>
-                  <a:srgbClr val="FFFFFF"/>
+                  <a:srgbClr val="12151C"/>
                 </a:solidFill>
                 <a:latin typeface="맑은 고딕"/>
                 <a:ea typeface="맑은 고딕"/>
               </a:rPr>
-              <a:t>E</a:t>
-            </a:r>
-          </a:p>
-        </p:txBody>
-      </p:sp>
-      <p:sp>
-        <p:nvSpPr>
-          <p:cNvPr id="10" name="텍스트"/>
+              <a:t>010-1234-5678</a:t>
+            </a:r>
+          </a:p>
+        </p:txBody>
+      </p:sp>
+      <p:sp>
+        <p:nvSpPr>
+          <p:cNvPr id="9" name="텍스트"/>
           <p:cNvSpPr txBox="1"/>
           <p:nvPr/>
         </p:nvSpPr>
         <p:spPr>
           <a:xfrm>
-            <a:off x="360000" y="1576800"/>
-            <a:ext cx="1368000" cy="108000"/>
+            <a:off x="252000" y="1472400"/>
+            <a:ext cx="331200" cy="99061"/>
           </a:xfrm>
           <a:prstGeom prst="rect">
             <a:avLst/>
@@ -3458,32 +3390,32 @@
           <a:p>
             <a:pPr algn="l">
               <a:lnSpc>
-                <a:spcPts val="1015"/>
+                <a:spcPts val="754"/>
               </a:lnSpc>
             </a:pPr>
             <a:r>
-              <a:rPr sz="700" b="0">
+              <a:rPr sz="520" b="1" spc="120">
                 <a:solidFill>
-                  <a:srgbClr val="FFFFFF"/>
+                  <a:srgbClr val="6B7280"/>
                 </a:solidFill>
                 <a:latin typeface="맑은 고딕"/>
                 <a:ea typeface="맑은 고딕"/>
               </a:rPr>
-              <a:t>name@example.com</a:t>
-            </a:r>
-          </a:p>
-        </p:txBody>
-      </p:sp>
-      <p:sp>
-        <p:nvSpPr>
-          <p:cNvPr id="11" name="텍스트"/>
+              <a:t>MAIL</a:t>
+            </a:r>
+          </a:p>
+        </p:txBody>
+      </p:sp>
+      <p:sp>
+        <p:nvSpPr>
+          <p:cNvPr id="10" name="텍스트"/>
           <p:cNvSpPr txBox="1"/>
           <p:nvPr/>
         </p:nvSpPr>
         <p:spPr>
           <a:xfrm>
-            <a:off x="1800000" y="1432800"/>
-            <a:ext cx="122400" cy="108000"/>
+            <a:off x="583200" y="1461600"/>
+            <a:ext cx="1296000" cy="129541"/>
           </a:xfrm>
           <a:prstGeom prst="rect">
             <a:avLst/>
@@ -3498,32 +3430,32 @@
           <a:p>
             <a:pPr algn="l">
               <a:lnSpc>
-                <a:spcPts val="1015"/>
+                <a:spcPts val="986"/>
               </a:lnSpc>
             </a:pPr>
             <a:r>
-              <a:rPr sz="700" b="1">
+              <a:rPr sz="680" b="0">
                 <a:solidFill>
-                  <a:srgbClr val="FFFFFF"/>
+                  <a:srgbClr val="12151C"/>
                 </a:solidFill>
                 <a:latin typeface="맑은 고딕"/>
                 <a:ea typeface="맑은 고딕"/>
               </a:rPr>
-              <a:t>A</a:t>
-            </a:r>
-          </a:p>
-        </p:txBody>
-      </p:sp>
-      <p:sp>
-        <p:nvSpPr>
-          <p:cNvPr id="12" name="텍스트"/>
+              <a:t>name@example.com</a:t>
+            </a:r>
+          </a:p>
+        </p:txBody>
+      </p:sp>
+      <p:sp>
+        <p:nvSpPr>
+          <p:cNvPr id="11" name="텍스트"/>
           <p:cNvSpPr txBox="1"/>
           <p:nvPr/>
         </p:nvSpPr>
         <p:spPr>
           <a:xfrm>
-            <a:off x="1944000" y="1432800"/>
-            <a:ext cx="1188000" cy="216000"/>
+            <a:off x="252000" y="1594800"/>
+            <a:ext cx="331200" cy="99061"/>
           </a:xfrm>
           <a:prstGeom prst="rect">
             <a:avLst/>
@@ -3538,13 +3470,53 @@
           <a:p>
             <a:pPr algn="l">
               <a:lnSpc>
-                <a:spcPts val="1015"/>
+                <a:spcPts val="754"/>
               </a:lnSpc>
             </a:pPr>
             <a:r>
-              <a:rPr sz="700" b="0">
+              <a:rPr sz="520" b="1" spc="120">
                 <a:solidFill>
-                  <a:srgbClr val="FFFFFF"/>
+                  <a:srgbClr val="6B7280"/>
+                </a:solidFill>
+                <a:latin typeface="맑은 고딕"/>
+                <a:ea typeface="맑은 고딕"/>
+              </a:rPr>
+              <a:t>ADDR</a:t>
+            </a:r>
+          </a:p>
+        </p:txBody>
+      </p:sp>
+      <p:sp>
+        <p:nvSpPr>
+          <p:cNvPr id="12" name="텍스트"/>
+          <p:cNvSpPr txBox="1"/>
+          <p:nvPr/>
+        </p:nvSpPr>
+        <p:spPr>
+          <a:xfrm>
+            <a:off x="583200" y="1584000"/>
+            <a:ext cx="1296000" cy="129541"/>
+          </a:xfrm>
+          <a:prstGeom prst="rect">
+            <a:avLst/>
+          </a:prstGeom>
+          <a:noFill/>
+        </p:spPr>
+        <p:txBody>
+          <a:bodyPr wrap="square" lIns="0" rIns="0" tIns="0" bIns="0" anchor="t">
+            <a:spAutoFit/>
+          </a:bodyPr>
+          <a:lstStyle/>
+          <a:p>
+            <a:pPr algn="l">
+              <a:lnSpc>
+                <a:spcPts val="986"/>
+              </a:lnSpc>
+            </a:pPr>
+            <a:r>
+              <a:rPr sz="680" b="0">
+                <a:solidFill>
+                  <a:srgbClr val="12151C"/>
                 </a:solidFill>
                 <a:latin typeface="맑은 고딕"/>
                 <a:ea typeface="맑은 고딕"/>
@@ -3568,7 +3540,7 @@
     <p:bg>
       <p:bgPr>
         <a:solidFill>
-          <a:srgbClr val="485F6B"/>
+          <a:srgbClr val="F3F4F6"/>
         </a:solidFill>
         <a:effectLst/>
       </p:bgPr>
@@ -3580,413 +3552,109 @@
         <p:nvPr/>
       </p:nvGrpSpPr>
       <p:grpSpPr/>
-      <p:cxnSp>
-        <p:nvCxnSpPr>
-          <p:cNvPr id="2" name="Connector 1"/>
-          <p:cNvCxnSpPr/>
+      <p:sp>
+        <p:nvSpPr>
+          <p:cNvPr id="2" name="Freeform 1"/>
+          <p:cNvSpPr/>
           <p:nvPr/>
-        </p:nvCxnSpPr>
+        </p:nvSpPr>
         <p:spPr>
           <a:xfrm>
-            <a:off x="0" y="93600"/>
-            <a:ext cx="3240000" cy="0"/>
+            <a:off x="0" y="0"/>
+            <a:ext cx="1080000" cy="1080000"/>
           </a:xfrm>
-          <a:prstGeom prst="line">
+          <a:custGeom>
             <a:avLst/>
-          </a:prstGeom>
-          <a:ln w="7200">
-            <a:solidFill>
-              <a:srgbClr val="D9E3E8">
-                <a:alpha val="30000"/>
-              </a:srgbClr>
-            </a:solidFill>
-          </a:ln>
-        </p:spPr>
-      </p:cxnSp>
-      <p:cxnSp>
-        <p:nvCxnSpPr>
-          <p:cNvPr id="3" name="Connector 2"/>
-          <p:cNvCxnSpPr/>
-          <p:nvPr/>
-        </p:nvCxnSpPr>
-        <p:spPr>
-          <a:xfrm>
-            <a:off x="0" y="201600"/>
-            <a:ext cx="3240000" cy="0"/>
-          </a:xfrm>
-          <a:prstGeom prst="line">
-            <a:avLst/>
-          </a:prstGeom>
-          <a:ln w="7200">
-            <a:solidFill>
-              <a:srgbClr val="D9E3E8">
-                <a:alpha val="30000"/>
-              </a:srgbClr>
-            </a:solidFill>
-          </a:ln>
-        </p:spPr>
-      </p:cxnSp>
-      <p:cxnSp>
-        <p:nvCxnSpPr>
-          <p:cNvPr id="4" name="Connector 3"/>
-          <p:cNvCxnSpPr/>
-          <p:nvPr/>
-        </p:nvCxnSpPr>
-        <p:spPr>
-          <a:xfrm>
-            <a:off x="0" y="309600"/>
-            <a:ext cx="3240000" cy="0"/>
-          </a:xfrm>
-          <a:prstGeom prst="line">
-            <a:avLst/>
-          </a:prstGeom>
-          <a:ln w="7200">
-            <a:solidFill>
-              <a:srgbClr val="D9E3E8">
-                <a:alpha val="30000"/>
-              </a:srgbClr>
-            </a:solidFill>
-          </a:ln>
-        </p:spPr>
-      </p:cxnSp>
-      <p:cxnSp>
-        <p:nvCxnSpPr>
-          <p:cNvPr id="5" name="Connector 4"/>
-          <p:cNvCxnSpPr/>
-          <p:nvPr/>
-        </p:nvCxnSpPr>
-        <p:spPr>
-          <a:xfrm>
-            <a:off x="0" y="417600"/>
-            <a:ext cx="3240000" cy="0"/>
-          </a:xfrm>
-          <a:prstGeom prst="line">
-            <a:avLst/>
-          </a:prstGeom>
-          <a:ln w="7200">
-            <a:solidFill>
-              <a:srgbClr val="D9E3E8">
-                <a:alpha val="30000"/>
-              </a:srgbClr>
-            </a:solidFill>
-          </a:ln>
-        </p:spPr>
-      </p:cxnSp>
-      <p:cxnSp>
-        <p:nvCxnSpPr>
-          <p:cNvPr id="6" name="Connector 5"/>
-          <p:cNvCxnSpPr/>
-          <p:nvPr/>
-        </p:nvCxnSpPr>
-        <p:spPr>
-          <a:xfrm>
-            <a:off x="0" y="525600"/>
-            <a:ext cx="3240000" cy="0"/>
-          </a:xfrm>
-          <a:prstGeom prst="line">
-            <a:avLst/>
-          </a:prstGeom>
-          <a:ln w="7200">
-            <a:solidFill>
-              <a:srgbClr val="D9E3E8">
-                <a:alpha val="30000"/>
-              </a:srgbClr>
-            </a:solidFill>
-          </a:ln>
-        </p:spPr>
-      </p:cxnSp>
-      <p:cxnSp>
-        <p:nvCxnSpPr>
-          <p:cNvPr id="7" name="Connector 6"/>
-          <p:cNvCxnSpPr/>
-          <p:nvPr/>
-        </p:nvCxnSpPr>
-        <p:spPr>
-          <a:xfrm>
-            <a:off x="0" y="633600"/>
-            <a:ext cx="3240000" cy="0"/>
-          </a:xfrm>
-          <a:prstGeom prst="line">
-            <a:avLst/>
-          </a:prstGeom>
-          <a:ln w="7200">
-            <a:solidFill>
-              <a:srgbClr val="D9E3E8">
-                <a:alpha val="30000"/>
-              </a:srgbClr>
-            </a:solidFill>
-          </a:ln>
-        </p:spPr>
-      </p:cxnSp>
-      <p:cxnSp>
-        <p:nvCxnSpPr>
-          <p:cNvPr id="8" name="Connector 7"/>
-          <p:cNvCxnSpPr/>
-          <p:nvPr/>
-        </p:nvCxnSpPr>
-        <p:spPr>
-          <a:xfrm>
-            <a:off x="0" y="741600"/>
-            <a:ext cx="3240000" cy="0"/>
-          </a:xfrm>
-          <a:prstGeom prst="line">
-            <a:avLst/>
-          </a:prstGeom>
-          <a:ln w="7200">
-            <a:solidFill>
-              <a:srgbClr val="D9E3E8">
-                <a:alpha val="30000"/>
-              </a:srgbClr>
-            </a:solidFill>
-          </a:ln>
-        </p:spPr>
-      </p:cxnSp>
-      <p:cxnSp>
-        <p:nvCxnSpPr>
-          <p:cNvPr id="9" name="Connector 8"/>
-          <p:cNvCxnSpPr/>
-          <p:nvPr/>
-        </p:nvCxnSpPr>
-        <p:spPr>
-          <a:xfrm>
-            <a:off x="0" y="849600"/>
-            <a:ext cx="3240000" cy="0"/>
-          </a:xfrm>
-          <a:prstGeom prst="line">
-            <a:avLst/>
-          </a:prstGeom>
-          <a:ln w="7200">
-            <a:solidFill>
-              <a:srgbClr val="D9E3E8">
-                <a:alpha val="30000"/>
-              </a:srgbClr>
-            </a:solidFill>
-          </a:ln>
-        </p:spPr>
-      </p:cxnSp>
-      <p:cxnSp>
-        <p:nvCxnSpPr>
-          <p:cNvPr id="10" name="Connector 9"/>
-          <p:cNvCxnSpPr/>
-          <p:nvPr/>
-        </p:nvCxnSpPr>
-        <p:spPr>
-          <a:xfrm>
-            <a:off x="0" y="957600"/>
-            <a:ext cx="3240000" cy="0"/>
-          </a:xfrm>
-          <a:prstGeom prst="line">
-            <a:avLst/>
-          </a:prstGeom>
-          <a:ln w="7200">
-            <a:solidFill>
-              <a:srgbClr val="D9E3E8">
-                <a:alpha val="30000"/>
-              </a:srgbClr>
-            </a:solidFill>
-          </a:ln>
-        </p:spPr>
-      </p:cxnSp>
-      <p:cxnSp>
-        <p:nvCxnSpPr>
-          <p:cNvPr id="11" name="Connector 10"/>
-          <p:cNvCxnSpPr/>
-          <p:nvPr/>
-        </p:nvCxnSpPr>
-        <p:spPr>
-          <a:xfrm>
-            <a:off x="0" y="1065600"/>
-            <a:ext cx="3240000" cy="0"/>
-          </a:xfrm>
-          <a:prstGeom prst="line">
-            <a:avLst/>
-          </a:prstGeom>
-          <a:ln w="7200">
-            <a:solidFill>
-              <a:srgbClr val="D9E3E8">
-                <a:alpha val="30000"/>
-              </a:srgbClr>
-            </a:solidFill>
-          </a:ln>
-        </p:spPr>
-      </p:cxnSp>
-      <p:cxnSp>
-        <p:nvCxnSpPr>
-          <p:cNvPr id="12" name="Connector 11"/>
-          <p:cNvCxnSpPr/>
-          <p:nvPr/>
-        </p:nvCxnSpPr>
-        <p:spPr>
-          <a:xfrm>
-            <a:off x="0" y="1173600"/>
-            <a:ext cx="3240000" cy="0"/>
-          </a:xfrm>
-          <a:prstGeom prst="line">
-            <a:avLst/>
-          </a:prstGeom>
-          <a:ln w="7200">
-            <a:solidFill>
-              <a:srgbClr val="D9E3E8">
-                <a:alpha val="30000"/>
-              </a:srgbClr>
-            </a:solidFill>
-          </a:ln>
-        </p:spPr>
-      </p:cxnSp>
-      <p:cxnSp>
-        <p:nvCxnSpPr>
-          <p:cNvPr id="13" name="Connector 12"/>
-          <p:cNvCxnSpPr/>
-          <p:nvPr/>
-        </p:nvCxnSpPr>
-        <p:spPr>
-          <a:xfrm>
-            <a:off x="0" y="1281600"/>
-            <a:ext cx="3240000" cy="0"/>
-          </a:xfrm>
-          <a:prstGeom prst="line">
-            <a:avLst/>
-          </a:prstGeom>
-          <a:ln w="7200">
-            <a:solidFill>
-              <a:srgbClr val="D9E3E8">
-                <a:alpha val="30000"/>
-              </a:srgbClr>
-            </a:solidFill>
-          </a:ln>
-        </p:spPr>
-      </p:cxnSp>
-      <p:cxnSp>
-        <p:nvCxnSpPr>
-          <p:cNvPr id="14" name="Connector 13"/>
-          <p:cNvCxnSpPr/>
-          <p:nvPr/>
-        </p:nvCxnSpPr>
-        <p:spPr>
-          <a:xfrm>
-            <a:off x="0" y="1389600"/>
-            <a:ext cx="3240000" cy="0"/>
-          </a:xfrm>
-          <a:prstGeom prst="line">
-            <a:avLst/>
-          </a:prstGeom>
-          <a:ln w="7200">
-            <a:solidFill>
-              <a:srgbClr val="D9E3E8">
-                <a:alpha val="30000"/>
-              </a:srgbClr>
-            </a:solidFill>
-          </a:ln>
-        </p:spPr>
-      </p:cxnSp>
-      <p:cxnSp>
-        <p:nvCxnSpPr>
-          <p:cNvPr id="15" name="Connector 14"/>
-          <p:cNvCxnSpPr/>
-          <p:nvPr/>
-        </p:nvCxnSpPr>
-        <p:spPr>
-          <a:xfrm>
-            <a:off x="0" y="1497600"/>
-            <a:ext cx="3240000" cy="0"/>
-          </a:xfrm>
-          <a:prstGeom prst="line">
-            <a:avLst/>
-          </a:prstGeom>
-          <a:ln w="7200">
-            <a:solidFill>
-              <a:srgbClr val="D9E3E8">
-                <a:alpha val="30000"/>
-              </a:srgbClr>
-            </a:solidFill>
-          </a:ln>
-        </p:spPr>
-      </p:cxnSp>
-      <p:cxnSp>
-        <p:nvCxnSpPr>
-          <p:cNvPr id="16" name="Connector 15"/>
-          <p:cNvCxnSpPr/>
-          <p:nvPr/>
-        </p:nvCxnSpPr>
-        <p:spPr>
-          <a:xfrm>
-            <a:off x="0" y="1605600"/>
-            <a:ext cx="3240000" cy="0"/>
-          </a:xfrm>
-          <a:prstGeom prst="line">
-            <a:avLst/>
-          </a:prstGeom>
-          <a:ln w="7200">
-            <a:solidFill>
-              <a:srgbClr val="D9E3E8">
-                <a:alpha val="30000"/>
-              </a:srgbClr>
-            </a:solidFill>
-          </a:ln>
-        </p:spPr>
-      </p:cxnSp>
-      <p:cxnSp>
-        <p:nvCxnSpPr>
-          <p:cNvPr id="17" name="Connector 16"/>
-          <p:cNvCxnSpPr/>
-          <p:nvPr/>
-        </p:nvCxnSpPr>
-        <p:spPr>
-          <a:xfrm>
-            <a:off x="0" y="1713600"/>
-            <a:ext cx="3240000" cy="0"/>
-          </a:xfrm>
-          <a:prstGeom prst="line">
-            <a:avLst/>
-          </a:prstGeom>
-          <a:ln w="7200">
-            <a:solidFill>
-              <a:srgbClr val="D9E3E8">
-                <a:alpha val="30000"/>
-              </a:srgbClr>
-            </a:solidFill>
-          </a:ln>
-        </p:spPr>
-      </p:cxnSp>
-      <p:cxnSp>
-        <p:nvCxnSpPr>
-          <p:cNvPr id="18" name="Connector 17"/>
-          <p:cNvCxnSpPr/>
-          <p:nvPr/>
-        </p:nvCxnSpPr>
-        <p:spPr>
-          <a:xfrm>
-            <a:off x="0" y="1821600"/>
-            <a:ext cx="3240000" cy="0"/>
-          </a:xfrm>
-          <a:prstGeom prst="line">
-            <a:avLst/>
-          </a:prstGeom>
-          <a:ln w="7200">
-            <a:solidFill>
-              <a:srgbClr val="D9E3E8">
-                <a:alpha val="30000"/>
-              </a:srgbClr>
-            </a:solidFill>
-          </a:ln>
-        </p:spPr>
-      </p:cxnSp>
-      <p:sp>
-        <p:nvSpPr>
-          <p:cNvPr id="19" name="Rectangle 18"/>
-          <p:cNvSpPr/>
-          <p:nvPr/>
-        </p:nvSpPr>
-        <p:spPr>
-          <a:xfrm>
-            <a:off x="468000" y="468000"/>
-            <a:ext cx="2304000" cy="864000"/>
-          </a:xfrm>
-          <a:prstGeom prst="rect">
-            <a:avLst/>
-          </a:prstGeom>
+            <a:gdLst/>
+            <a:ahLst/>
+            <a:cxnLst/>
+            <a:rect l="l" t="t" r="r" b="b"/>
+            <a:pathLst>
+              <a:path w="1080000" h="1080000">
+                <a:moveTo>
+                  <a:pt x="0" y="0"/>
+                </a:moveTo>
+                <a:lnTo>
+                  <a:pt x="1080000" y="0"/>
+                </a:lnTo>
+                <a:lnTo>
+                  <a:pt x="1077688" y="70635"/>
+                </a:lnTo>
+                <a:lnTo>
+                  <a:pt x="1070760" y="140968"/>
+                </a:lnTo>
+                <a:lnTo>
+                  <a:pt x="1059248" y="210698"/>
+                </a:lnTo>
+                <a:lnTo>
+                  <a:pt x="1043200" y="279525"/>
+                </a:lnTo>
+                <a:lnTo>
+                  <a:pt x="1022685" y="347155"/>
+                </a:lnTo>
+                <a:lnTo>
+                  <a:pt x="997790" y="413298"/>
+                </a:lnTo>
+                <a:lnTo>
+                  <a:pt x="968623" y="477672"/>
+                </a:lnTo>
+                <a:lnTo>
+                  <a:pt x="935307" y="540000"/>
+                </a:lnTo>
+                <a:lnTo>
+                  <a:pt x="897987" y="600016"/>
+                </a:lnTo>
+                <a:lnTo>
+                  <a:pt x="856822" y="657462"/>
+                </a:lnTo>
+                <a:lnTo>
+                  <a:pt x="811987" y="712093"/>
+                </a:lnTo>
+                <a:lnTo>
+                  <a:pt x="763675" y="763675"/>
+                </a:lnTo>
+                <a:lnTo>
+                  <a:pt x="712093" y="811987"/>
+                </a:lnTo>
+                <a:lnTo>
+                  <a:pt x="657462" y="856822"/>
+                </a:lnTo>
+                <a:lnTo>
+                  <a:pt x="600016" y="897987"/>
+                </a:lnTo>
+                <a:lnTo>
+                  <a:pt x="540000" y="935307"/>
+                </a:lnTo>
+                <a:lnTo>
+                  <a:pt x="477672" y="968623"/>
+                </a:lnTo>
+                <a:lnTo>
+                  <a:pt x="413298" y="997790"/>
+                </a:lnTo>
+                <a:lnTo>
+                  <a:pt x="347155" y="1022685"/>
+                </a:lnTo>
+                <a:lnTo>
+                  <a:pt x="279525" y="1043200"/>
+                </a:lnTo>
+                <a:lnTo>
+                  <a:pt x="210698" y="1059248"/>
+                </a:lnTo>
+                <a:lnTo>
+                  <a:pt x="140968" y="1070760"/>
+                </a:lnTo>
+                <a:lnTo>
+                  <a:pt x="70635" y="1077688"/>
+                </a:lnTo>
+                <a:lnTo>
+                  <a:pt x="0" y="1080000"/>
+                </a:lnTo>
+                <a:close/>
+              </a:path>
+            </a:pathLst>
+          </a:custGeom>
           <a:solidFill>
-            <a:srgbClr val="485F6B"/>
+            <a:srgbClr val="FF9E6B"/>
           </a:solidFill>
           <a:ln>
             <a:noFill/>
@@ -4002,23 +3670,110 @@
       </p:sp>
       <p:sp>
         <p:nvSpPr>
-          <p:cNvPr id="20" name="Rectangle 19"/>
+          <p:cNvPr id="3" name="Freeform 2"/>
           <p:cNvSpPr/>
           <p:nvPr/>
         </p:nvSpPr>
         <p:spPr>
           <a:xfrm>
-            <a:off x="468000" y="468000"/>
-            <a:ext cx="2304000" cy="864000"/>
+            <a:off x="0" y="0"/>
+            <a:ext cx="684000" cy="684000"/>
           </a:xfrm>
-          <a:prstGeom prst="rect">
+          <a:custGeom>
             <a:avLst/>
-          </a:prstGeom>
-          <a:noFill/>
-          <a:ln w="9000">
-            <a:solidFill>
-              <a:srgbClr val="D9E3E8"/>
-            </a:solidFill>
+            <a:gdLst/>
+            <a:ahLst/>
+            <a:cxnLst/>
+            <a:rect l="l" t="t" r="r" b="b"/>
+            <a:pathLst>
+              <a:path w="684000" h="684000">
+                <a:moveTo>
+                  <a:pt x="0" y="0"/>
+                </a:moveTo>
+                <a:lnTo>
+                  <a:pt x="684000" y="0"/>
+                </a:lnTo>
+                <a:lnTo>
+                  <a:pt x="682536" y="44736"/>
+                </a:lnTo>
+                <a:lnTo>
+                  <a:pt x="678148" y="89280"/>
+                </a:lnTo>
+                <a:lnTo>
+                  <a:pt x="670857" y="133442"/>
+                </a:lnTo>
+                <a:lnTo>
+                  <a:pt x="660693" y="177032"/>
+                </a:lnTo>
+                <a:lnTo>
+                  <a:pt x="647700" y="219865"/>
+                </a:lnTo>
+                <a:lnTo>
+                  <a:pt x="631934" y="261755"/>
+                </a:lnTo>
+                <a:lnTo>
+                  <a:pt x="613461" y="302525"/>
+                </a:lnTo>
+                <a:lnTo>
+                  <a:pt x="592361" y="342000"/>
+                </a:lnTo>
+                <a:lnTo>
+                  <a:pt x="568725" y="380010"/>
+                </a:lnTo>
+                <a:lnTo>
+                  <a:pt x="542654" y="416393"/>
+                </a:lnTo>
+                <a:lnTo>
+                  <a:pt x="514258" y="450993"/>
+                </a:lnTo>
+                <a:lnTo>
+                  <a:pt x="483661" y="483661"/>
+                </a:lnTo>
+                <a:lnTo>
+                  <a:pt x="450993" y="514258"/>
+                </a:lnTo>
+                <a:lnTo>
+                  <a:pt x="416393" y="542654"/>
+                </a:lnTo>
+                <a:lnTo>
+                  <a:pt x="380010" y="568725"/>
+                </a:lnTo>
+                <a:lnTo>
+                  <a:pt x="342000" y="592361"/>
+                </a:lnTo>
+                <a:lnTo>
+                  <a:pt x="302525" y="613461"/>
+                </a:lnTo>
+                <a:lnTo>
+                  <a:pt x="261755" y="631934"/>
+                </a:lnTo>
+                <a:lnTo>
+                  <a:pt x="219865" y="647700"/>
+                </a:lnTo>
+                <a:lnTo>
+                  <a:pt x="177032" y="660693"/>
+                </a:lnTo>
+                <a:lnTo>
+                  <a:pt x="133442" y="670857"/>
+                </a:lnTo>
+                <a:lnTo>
+                  <a:pt x="89280" y="678148"/>
+                </a:lnTo>
+                <a:lnTo>
+                  <a:pt x="44736" y="682536"/>
+                </a:lnTo>
+                <a:lnTo>
+                  <a:pt x="0" y="684000"/>
+                </a:lnTo>
+                <a:close/>
+              </a:path>
+            </a:pathLst>
+          </a:custGeom>
+          <a:solidFill>
+            <a:srgbClr val="F5E8E3"/>
+          </a:solidFill>
+          <a:ln>
+            <a:noFill/>
           </a:ln>
         </p:spPr>
         <p:txBody>
@@ -4031,14 +3786,14 @@
       </p:sp>
       <p:sp>
         <p:nvSpPr>
-          <p:cNvPr id="21" name="텍스트"/>
+          <p:cNvPr id="4" name="텍스트"/>
           <p:cNvSpPr txBox="1"/>
           <p:nvPr/>
         </p:nvSpPr>
         <p:spPr>
           <a:xfrm>
-            <a:off x="576000" y="540000"/>
-            <a:ext cx="2088000" cy="720000"/>
+            <a:off x="1188000" y="1044000"/>
+            <a:ext cx="1800000" cy="432000"/>
           </a:xfrm>
           <a:prstGeom prst="rect">
             <a:avLst/>
@@ -4046,40 +3801,40 @@
           <a:noFill/>
         </p:spPr>
         <p:txBody>
-          <a:bodyPr wrap="square" lIns="0" rIns="0" tIns="0" bIns="0" anchor="ctr">
+          <a:bodyPr wrap="square" lIns="0" rIns="0" tIns="0" bIns="0" anchor="t">
             <a:spAutoFit/>
           </a:bodyPr>
           <a:lstStyle/>
           <a:p>
-            <a:pPr algn="ctr">
+            <a:pPr algn="r">
               <a:lnSpc>
-                <a:spcPts val="1667"/>
+                <a:spcPts val="1739"/>
               </a:lnSpc>
             </a:pPr>
             <a:r>
-              <a:rPr sz="1150" b="1">
+              <a:rPr sz="1200" b="1">
                 <a:solidFill>
-                  <a:srgbClr val="FFFFFF"/>
+                  <a:srgbClr val="12151C"/>
                 </a:solidFill>
-                <a:latin typeface="바탕"/>
-                <a:ea typeface="바탕"/>
+                <a:latin typeface="맑은 고딕"/>
+                <a:ea typeface="맑은 고딕"/>
               </a:rPr>
               <a:t>첫 스케치의 설렘을</a:t>
             </a:r>
           </a:p>
           <a:p>
-            <a:pPr algn="ctr">
+            <a:pPr algn="r">
               <a:lnSpc>
-                <a:spcPts val="1667"/>
+                <a:spcPts val="1739"/>
               </a:lnSpc>
             </a:pPr>
             <a:r>
-              <a:rPr sz="1150" b="1">
+              <a:rPr sz="1200" b="1">
                 <a:solidFill>
-                  <a:srgbClr val="FFFFFF"/>
+                  <a:srgbClr val="12151C"/>
                 </a:solidFill>
-                <a:latin typeface="바탕"/>
-                <a:ea typeface="바탕"/>
+                <a:latin typeface="맑은 고딕"/>
+                <a:ea typeface="맑은 고딕"/>
               </a:rPr>
               <a:t>잊지 않습니다</a:t>
             </a:r>
@@ -4088,14 +3843,14 @@
       </p:sp>
       <p:sp>
         <p:nvSpPr>
-          <p:cNvPr id="22" name="텍스트"/>
+          <p:cNvPr id="5" name="텍스트"/>
           <p:cNvSpPr txBox="1"/>
           <p:nvPr/>
         </p:nvSpPr>
         <p:spPr>
           <a:xfrm>
-            <a:off x="360000" y="1468800"/>
-            <a:ext cx="2520000" cy="108000"/>
+            <a:off x="1188000" y="1526400"/>
+            <a:ext cx="1800000" cy="123826"/>
           </a:xfrm>
           <a:prstGeom prst="rect">
             <a:avLst/>
@@ -4108,15 +3863,15 @@
           </a:bodyPr>
           <a:lstStyle/>
           <a:p>
-            <a:pPr algn="ctr">
+            <a:pPr algn="r">
               <a:lnSpc>
-                <a:spcPts val="1015"/>
+                <a:spcPts val="942"/>
               </a:lnSpc>
             </a:pPr>
             <a:r>
-              <a:rPr sz="700" b="1" spc="300">
+              <a:rPr sz="650" b="1" spc="200">
                 <a:solidFill>
-                  <a:srgbClr val="CFD5D8"/>
+                  <a:srgbClr val="6B7280"/>
                 </a:solidFill>
                 <a:latin typeface="맑은 고딕"/>
                 <a:ea typeface="맑은 고딕"/>

--- a/public/fun/cards/creative/creative-16.pptx
+++ b/public/fun/cards/creative/creative-16.pptx
@@ -3099,54 +3099,673 @@
       <p:grpSpPr/>
       <p:sp>
         <p:nvSpPr>
-          <p:cNvPr id="2" name="텍스트"/>
+          <p:cNvPr id="2" name="Rectangle 1"/>
+          <p:cNvSpPr/>
+          <p:nvPr/>
+        </p:nvSpPr>
+        <p:spPr>
+          <a:xfrm>
+            <a:off x="2016000" y="0"/>
+            <a:ext cx="1224000" cy="756000"/>
+          </a:xfrm>
+          <a:prstGeom prst="rect">
+            <a:avLst/>
+          </a:prstGeom>
+          <a:solidFill>
+            <a:srgbClr val="FF9E6B"/>
+          </a:solidFill>
+          <a:ln>
+            <a:noFill/>
+          </a:ln>
+        </p:spPr>
+        <p:txBody>
+          <a:bodyPr rtlCol="0" anchor="ctr"/>
+          <a:lstStyle/>
+          <a:p>
+            <a:pPr algn="ctr"/>
+          </a:p>
+        </p:txBody>
+      </p:sp>
+      <p:cxnSp>
+        <p:nvCxnSpPr>
+          <p:cNvPr id="3" name="Connector 2"/>
+          <p:cNvCxnSpPr/>
+          <p:nvPr/>
+        </p:nvCxnSpPr>
+        <p:spPr>
+          <a:xfrm flipV="1">
+            <a:off x="2016000" y="0"/>
+            <a:ext cx="64800" cy="64800"/>
+          </a:xfrm>
+          <a:prstGeom prst="line">
+            <a:avLst/>
+          </a:prstGeom>
+          <a:ln w="3600">
+            <a:solidFill>
+              <a:srgbClr val="12151C"/>
+            </a:solidFill>
+          </a:ln>
+        </p:spPr>
+      </p:cxnSp>
+      <p:cxnSp>
+        <p:nvCxnSpPr>
+          <p:cNvPr id="4" name="Connector 3"/>
+          <p:cNvCxnSpPr/>
+          <p:nvPr/>
+        </p:nvCxnSpPr>
+        <p:spPr>
+          <a:xfrm flipV="1">
+            <a:off x="2016000" y="0"/>
+            <a:ext cx="129600" cy="129600"/>
+          </a:xfrm>
+          <a:prstGeom prst="line">
+            <a:avLst/>
+          </a:prstGeom>
+          <a:ln w="3600">
+            <a:solidFill>
+              <a:srgbClr val="12151C"/>
+            </a:solidFill>
+          </a:ln>
+        </p:spPr>
+      </p:cxnSp>
+      <p:cxnSp>
+        <p:nvCxnSpPr>
+          <p:cNvPr id="5" name="Connector 4"/>
+          <p:cNvCxnSpPr/>
+          <p:nvPr/>
+        </p:nvCxnSpPr>
+        <p:spPr>
+          <a:xfrm flipV="1">
+            <a:off x="2016000" y="0"/>
+            <a:ext cx="194400" cy="194400"/>
+          </a:xfrm>
+          <a:prstGeom prst="line">
+            <a:avLst/>
+          </a:prstGeom>
+          <a:ln w="3600">
+            <a:solidFill>
+              <a:srgbClr val="12151C"/>
+            </a:solidFill>
+          </a:ln>
+        </p:spPr>
+      </p:cxnSp>
+      <p:cxnSp>
+        <p:nvCxnSpPr>
+          <p:cNvPr id="6" name="Connector 5"/>
+          <p:cNvCxnSpPr/>
+          <p:nvPr/>
+        </p:nvCxnSpPr>
+        <p:spPr>
+          <a:xfrm flipV="1">
+            <a:off x="2016000" y="0"/>
+            <a:ext cx="259200" cy="259200"/>
+          </a:xfrm>
+          <a:prstGeom prst="line">
+            <a:avLst/>
+          </a:prstGeom>
+          <a:ln w="3600">
+            <a:solidFill>
+              <a:srgbClr val="12151C"/>
+            </a:solidFill>
+          </a:ln>
+        </p:spPr>
+      </p:cxnSp>
+      <p:cxnSp>
+        <p:nvCxnSpPr>
+          <p:cNvPr id="7" name="Connector 6"/>
+          <p:cNvCxnSpPr/>
+          <p:nvPr/>
+        </p:nvCxnSpPr>
+        <p:spPr>
+          <a:xfrm flipV="1">
+            <a:off x="2016000" y="0"/>
+            <a:ext cx="324000" cy="324000"/>
+          </a:xfrm>
+          <a:prstGeom prst="line">
+            <a:avLst/>
+          </a:prstGeom>
+          <a:ln w="3600">
+            <a:solidFill>
+              <a:srgbClr val="12151C"/>
+            </a:solidFill>
+          </a:ln>
+        </p:spPr>
+      </p:cxnSp>
+      <p:cxnSp>
+        <p:nvCxnSpPr>
+          <p:cNvPr id="8" name="Connector 7"/>
+          <p:cNvCxnSpPr/>
+          <p:nvPr/>
+        </p:nvCxnSpPr>
+        <p:spPr>
+          <a:xfrm flipV="1">
+            <a:off x="2016000" y="0"/>
+            <a:ext cx="388800" cy="388800"/>
+          </a:xfrm>
+          <a:prstGeom prst="line">
+            <a:avLst/>
+          </a:prstGeom>
+          <a:ln w="3600">
+            <a:solidFill>
+              <a:srgbClr val="12151C"/>
+            </a:solidFill>
+          </a:ln>
+        </p:spPr>
+      </p:cxnSp>
+      <p:cxnSp>
+        <p:nvCxnSpPr>
+          <p:cNvPr id="9" name="Connector 8"/>
+          <p:cNvCxnSpPr/>
+          <p:nvPr/>
+        </p:nvCxnSpPr>
+        <p:spPr>
+          <a:xfrm flipV="1">
+            <a:off x="2016000" y="0"/>
+            <a:ext cx="453600" cy="453600"/>
+          </a:xfrm>
+          <a:prstGeom prst="line">
+            <a:avLst/>
+          </a:prstGeom>
+          <a:ln w="3600">
+            <a:solidFill>
+              <a:srgbClr val="12151C"/>
+            </a:solidFill>
+          </a:ln>
+        </p:spPr>
+      </p:cxnSp>
+      <p:cxnSp>
+        <p:nvCxnSpPr>
+          <p:cNvPr id="10" name="Connector 9"/>
+          <p:cNvCxnSpPr/>
+          <p:nvPr/>
+        </p:nvCxnSpPr>
+        <p:spPr>
+          <a:xfrm flipV="1">
+            <a:off x="2016000" y="0"/>
+            <a:ext cx="518400" cy="518400"/>
+          </a:xfrm>
+          <a:prstGeom prst="line">
+            <a:avLst/>
+          </a:prstGeom>
+          <a:ln w="3600">
+            <a:solidFill>
+              <a:srgbClr val="12151C"/>
+            </a:solidFill>
+          </a:ln>
+        </p:spPr>
+      </p:cxnSp>
+      <p:cxnSp>
+        <p:nvCxnSpPr>
+          <p:cNvPr id="11" name="Connector 10"/>
+          <p:cNvCxnSpPr/>
+          <p:nvPr/>
+        </p:nvCxnSpPr>
+        <p:spPr>
+          <a:xfrm flipV="1">
+            <a:off x="2016000" y="0"/>
+            <a:ext cx="583200" cy="583200"/>
+          </a:xfrm>
+          <a:prstGeom prst="line">
+            <a:avLst/>
+          </a:prstGeom>
+          <a:ln w="3600">
+            <a:solidFill>
+              <a:srgbClr val="12151C"/>
+            </a:solidFill>
+          </a:ln>
+        </p:spPr>
+      </p:cxnSp>
+      <p:cxnSp>
+        <p:nvCxnSpPr>
+          <p:cNvPr id="12" name="Connector 11"/>
+          <p:cNvCxnSpPr/>
+          <p:nvPr/>
+        </p:nvCxnSpPr>
+        <p:spPr>
+          <a:xfrm flipV="1">
+            <a:off x="2016000" y="0"/>
+            <a:ext cx="648000" cy="648000"/>
+          </a:xfrm>
+          <a:prstGeom prst="line">
+            <a:avLst/>
+          </a:prstGeom>
+          <a:ln w="3600">
+            <a:solidFill>
+              <a:srgbClr val="12151C"/>
+            </a:solidFill>
+          </a:ln>
+        </p:spPr>
+      </p:cxnSp>
+      <p:cxnSp>
+        <p:nvCxnSpPr>
+          <p:cNvPr id="13" name="Connector 12"/>
+          <p:cNvCxnSpPr/>
+          <p:nvPr/>
+        </p:nvCxnSpPr>
+        <p:spPr>
+          <a:xfrm flipV="1">
+            <a:off x="2016000" y="0"/>
+            <a:ext cx="712800" cy="712800"/>
+          </a:xfrm>
+          <a:prstGeom prst="line">
+            <a:avLst/>
+          </a:prstGeom>
+          <a:ln w="3600">
+            <a:solidFill>
+              <a:srgbClr val="12151C"/>
+            </a:solidFill>
+          </a:ln>
+        </p:spPr>
+      </p:cxnSp>
+      <p:cxnSp>
+        <p:nvCxnSpPr>
+          <p:cNvPr id="14" name="Connector 13"/>
+          <p:cNvCxnSpPr/>
+          <p:nvPr/>
+        </p:nvCxnSpPr>
+        <p:spPr>
+          <a:xfrm flipV="1">
+            <a:off x="2037600" y="0"/>
+            <a:ext cx="756000" cy="756000"/>
+          </a:xfrm>
+          <a:prstGeom prst="line">
+            <a:avLst/>
+          </a:prstGeom>
+          <a:ln w="3600">
+            <a:solidFill>
+              <a:srgbClr val="12151C"/>
+            </a:solidFill>
+          </a:ln>
+        </p:spPr>
+      </p:cxnSp>
+      <p:cxnSp>
+        <p:nvCxnSpPr>
+          <p:cNvPr id="15" name="Connector 14"/>
+          <p:cNvCxnSpPr/>
+          <p:nvPr/>
+        </p:nvCxnSpPr>
+        <p:spPr>
+          <a:xfrm flipV="1">
+            <a:off x="2102400" y="0"/>
+            <a:ext cx="756000" cy="756000"/>
+          </a:xfrm>
+          <a:prstGeom prst="line">
+            <a:avLst/>
+          </a:prstGeom>
+          <a:ln w="3600">
+            <a:solidFill>
+              <a:srgbClr val="12151C"/>
+            </a:solidFill>
+          </a:ln>
+        </p:spPr>
+      </p:cxnSp>
+      <p:cxnSp>
+        <p:nvCxnSpPr>
+          <p:cNvPr id="16" name="Connector 15"/>
+          <p:cNvCxnSpPr/>
+          <p:nvPr/>
+        </p:nvCxnSpPr>
+        <p:spPr>
+          <a:xfrm flipV="1">
+            <a:off x="2167200" y="0"/>
+            <a:ext cx="756000" cy="756000"/>
+          </a:xfrm>
+          <a:prstGeom prst="line">
+            <a:avLst/>
+          </a:prstGeom>
+          <a:ln w="3600">
+            <a:solidFill>
+              <a:srgbClr val="12151C"/>
+            </a:solidFill>
+          </a:ln>
+        </p:spPr>
+      </p:cxnSp>
+      <p:cxnSp>
+        <p:nvCxnSpPr>
+          <p:cNvPr id="17" name="Connector 16"/>
+          <p:cNvCxnSpPr/>
+          <p:nvPr/>
+        </p:nvCxnSpPr>
+        <p:spPr>
+          <a:xfrm flipV="1">
+            <a:off x="2232000" y="0"/>
+            <a:ext cx="756000" cy="756000"/>
+          </a:xfrm>
+          <a:prstGeom prst="line">
+            <a:avLst/>
+          </a:prstGeom>
+          <a:ln w="3600">
+            <a:solidFill>
+              <a:srgbClr val="12151C"/>
+            </a:solidFill>
+          </a:ln>
+        </p:spPr>
+      </p:cxnSp>
+      <p:cxnSp>
+        <p:nvCxnSpPr>
+          <p:cNvPr id="18" name="Connector 17"/>
+          <p:cNvCxnSpPr/>
+          <p:nvPr/>
+        </p:nvCxnSpPr>
+        <p:spPr>
+          <a:xfrm flipV="1">
+            <a:off x="2296800" y="0"/>
+            <a:ext cx="756000" cy="756000"/>
+          </a:xfrm>
+          <a:prstGeom prst="line">
+            <a:avLst/>
+          </a:prstGeom>
+          <a:ln w="3600">
+            <a:solidFill>
+              <a:srgbClr val="12151C"/>
+            </a:solidFill>
+          </a:ln>
+        </p:spPr>
+      </p:cxnSp>
+      <p:cxnSp>
+        <p:nvCxnSpPr>
+          <p:cNvPr id="19" name="Connector 18"/>
+          <p:cNvCxnSpPr/>
+          <p:nvPr/>
+        </p:nvCxnSpPr>
+        <p:spPr>
+          <a:xfrm flipV="1">
+            <a:off x="2361600" y="0"/>
+            <a:ext cx="756000" cy="756000"/>
+          </a:xfrm>
+          <a:prstGeom prst="line">
+            <a:avLst/>
+          </a:prstGeom>
+          <a:ln w="3600">
+            <a:solidFill>
+              <a:srgbClr val="12151C"/>
+            </a:solidFill>
+          </a:ln>
+        </p:spPr>
+      </p:cxnSp>
+      <p:cxnSp>
+        <p:nvCxnSpPr>
+          <p:cNvPr id="20" name="Connector 19"/>
+          <p:cNvCxnSpPr/>
+          <p:nvPr/>
+        </p:nvCxnSpPr>
+        <p:spPr>
+          <a:xfrm flipV="1">
+            <a:off x="2426400" y="0"/>
+            <a:ext cx="756000" cy="756000"/>
+          </a:xfrm>
+          <a:prstGeom prst="line">
+            <a:avLst/>
+          </a:prstGeom>
+          <a:ln w="3600">
+            <a:solidFill>
+              <a:srgbClr val="12151C"/>
+            </a:solidFill>
+          </a:ln>
+        </p:spPr>
+      </p:cxnSp>
+      <p:cxnSp>
+        <p:nvCxnSpPr>
+          <p:cNvPr id="21" name="Connector 20"/>
+          <p:cNvCxnSpPr/>
+          <p:nvPr/>
+        </p:nvCxnSpPr>
+        <p:spPr>
+          <a:xfrm flipV="1">
+            <a:off x="2491200" y="7200"/>
+            <a:ext cx="748800" cy="748800"/>
+          </a:xfrm>
+          <a:prstGeom prst="line">
+            <a:avLst/>
+          </a:prstGeom>
+          <a:ln w="3600">
+            <a:solidFill>
+              <a:srgbClr val="12151C"/>
+            </a:solidFill>
+          </a:ln>
+        </p:spPr>
+      </p:cxnSp>
+      <p:cxnSp>
+        <p:nvCxnSpPr>
+          <p:cNvPr id="22" name="Connector 21"/>
+          <p:cNvCxnSpPr/>
+          <p:nvPr/>
+        </p:nvCxnSpPr>
+        <p:spPr>
+          <a:xfrm flipV="1">
+            <a:off x="2556000" y="72000"/>
+            <a:ext cx="684000" cy="684000"/>
+          </a:xfrm>
+          <a:prstGeom prst="line">
+            <a:avLst/>
+          </a:prstGeom>
+          <a:ln w="3600">
+            <a:solidFill>
+              <a:srgbClr val="12151C"/>
+            </a:solidFill>
+          </a:ln>
+        </p:spPr>
+      </p:cxnSp>
+      <p:cxnSp>
+        <p:nvCxnSpPr>
+          <p:cNvPr id="23" name="Connector 22"/>
+          <p:cNvCxnSpPr/>
+          <p:nvPr/>
+        </p:nvCxnSpPr>
+        <p:spPr>
+          <a:xfrm flipV="1">
+            <a:off x="2620800" y="136800"/>
+            <a:ext cx="619200" cy="619200"/>
+          </a:xfrm>
+          <a:prstGeom prst="line">
+            <a:avLst/>
+          </a:prstGeom>
+          <a:ln w="3600">
+            <a:solidFill>
+              <a:srgbClr val="12151C"/>
+            </a:solidFill>
+          </a:ln>
+        </p:spPr>
+      </p:cxnSp>
+      <p:cxnSp>
+        <p:nvCxnSpPr>
+          <p:cNvPr id="24" name="Connector 23"/>
+          <p:cNvCxnSpPr/>
+          <p:nvPr/>
+        </p:nvCxnSpPr>
+        <p:spPr>
+          <a:xfrm flipV="1">
+            <a:off x="2685600" y="201600"/>
+            <a:ext cx="554400" cy="554400"/>
+          </a:xfrm>
+          <a:prstGeom prst="line">
+            <a:avLst/>
+          </a:prstGeom>
+          <a:ln w="3600">
+            <a:solidFill>
+              <a:srgbClr val="12151C"/>
+            </a:solidFill>
+          </a:ln>
+        </p:spPr>
+      </p:cxnSp>
+      <p:cxnSp>
+        <p:nvCxnSpPr>
+          <p:cNvPr id="25" name="Connector 24"/>
+          <p:cNvCxnSpPr/>
+          <p:nvPr/>
+        </p:nvCxnSpPr>
+        <p:spPr>
+          <a:xfrm flipV="1">
+            <a:off x="2750400" y="266400"/>
+            <a:ext cx="489600" cy="489600"/>
+          </a:xfrm>
+          <a:prstGeom prst="line">
+            <a:avLst/>
+          </a:prstGeom>
+          <a:ln w="3600">
+            <a:solidFill>
+              <a:srgbClr val="12151C"/>
+            </a:solidFill>
+          </a:ln>
+        </p:spPr>
+      </p:cxnSp>
+      <p:cxnSp>
+        <p:nvCxnSpPr>
+          <p:cNvPr id="26" name="Connector 25"/>
+          <p:cNvCxnSpPr/>
+          <p:nvPr/>
+        </p:nvCxnSpPr>
+        <p:spPr>
+          <a:xfrm flipV="1">
+            <a:off x="2815200" y="331200"/>
+            <a:ext cx="424800" cy="424800"/>
+          </a:xfrm>
+          <a:prstGeom prst="line">
+            <a:avLst/>
+          </a:prstGeom>
+          <a:ln w="3600">
+            <a:solidFill>
+              <a:srgbClr val="12151C"/>
+            </a:solidFill>
+          </a:ln>
+        </p:spPr>
+      </p:cxnSp>
+      <p:cxnSp>
+        <p:nvCxnSpPr>
+          <p:cNvPr id="27" name="Connector 26"/>
+          <p:cNvCxnSpPr/>
+          <p:nvPr/>
+        </p:nvCxnSpPr>
+        <p:spPr>
+          <a:xfrm flipV="1">
+            <a:off x="2880000" y="396000"/>
+            <a:ext cx="360000" cy="360000"/>
+          </a:xfrm>
+          <a:prstGeom prst="line">
+            <a:avLst/>
+          </a:prstGeom>
+          <a:ln w="3600">
+            <a:solidFill>
+              <a:srgbClr val="12151C"/>
+            </a:solidFill>
+          </a:ln>
+        </p:spPr>
+      </p:cxnSp>
+      <p:cxnSp>
+        <p:nvCxnSpPr>
+          <p:cNvPr id="28" name="Connector 27"/>
+          <p:cNvCxnSpPr/>
+          <p:nvPr/>
+        </p:nvCxnSpPr>
+        <p:spPr>
+          <a:xfrm flipV="1">
+            <a:off x="2944800" y="460800"/>
+            <a:ext cx="295200" cy="295200"/>
+          </a:xfrm>
+          <a:prstGeom prst="line">
+            <a:avLst/>
+          </a:prstGeom>
+          <a:ln w="3600">
+            <a:solidFill>
+              <a:srgbClr val="12151C"/>
+            </a:solidFill>
+          </a:ln>
+        </p:spPr>
+      </p:cxnSp>
+      <p:cxnSp>
+        <p:nvCxnSpPr>
+          <p:cNvPr id="29" name="Connector 28"/>
+          <p:cNvCxnSpPr/>
+          <p:nvPr/>
+        </p:nvCxnSpPr>
+        <p:spPr>
+          <a:xfrm flipV="1">
+            <a:off x="3009600" y="525600"/>
+            <a:ext cx="230400" cy="230400"/>
+          </a:xfrm>
+          <a:prstGeom prst="line">
+            <a:avLst/>
+          </a:prstGeom>
+          <a:ln w="3600">
+            <a:solidFill>
+              <a:srgbClr val="12151C"/>
+            </a:solidFill>
+          </a:ln>
+        </p:spPr>
+      </p:cxnSp>
+      <p:cxnSp>
+        <p:nvCxnSpPr>
+          <p:cNvPr id="30" name="Connector 29"/>
+          <p:cNvCxnSpPr/>
+          <p:nvPr/>
+        </p:nvCxnSpPr>
+        <p:spPr>
+          <a:xfrm flipV="1">
+            <a:off x="3074400" y="590400"/>
+            <a:ext cx="165600" cy="165600"/>
+          </a:xfrm>
+          <a:prstGeom prst="line">
+            <a:avLst/>
+          </a:prstGeom>
+          <a:ln w="3600">
+            <a:solidFill>
+              <a:srgbClr val="12151C"/>
+            </a:solidFill>
+          </a:ln>
+        </p:spPr>
+      </p:cxnSp>
+      <p:cxnSp>
+        <p:nvCxnSpPr>
+          <p:cNvPr id="31" name="Connector 30"/>
+          <p:cNvCxnSpPr/>
+          <p:nvPr/>
+        </p:nvCxnSpPr>
+        <p:spPr>
+          <a:xfrm flipV="1">
+            <a:off x="3139200" y="655200"/>
+            <a:ext cx="100800" cy="100800"/>
+          </a:xfrm>
+          <a:prstGeom prst="line">
+            <a:avLst/>
+          </a:prstGeom>
+          <a:ln w="3600">
+            <a:solidFill>
+              <a:srgbClr val="12151C"/>
+            </a:solidFill>
+          </a:ln>
+        </p:spPr>
+      </p:cxnSp>
+      <p:cxnSp>
+        <p:nvCxnSpPr>
+          <p:cNvPr id="32" name="Connector 31"/>
+          <p:cNvCxnSpPr/>
+          <p:nvPr/>
+        </p:nvCxnSpPr>
+        <p:spPr>
+          <a:xfrm flipV="1">
+            <a:off x="3204000" y="720000"/>
+            <a:ext cx="36000" cy="36000"/>
+          </a:xfrm>
+          <a:prstGeom prst="line">
+            <a:avLst/>
+          </a:prstGeom>
+          <a:ln w="3600">
+            <a:solidFill>
+              <a:srgbClr val="12151C"/>
+            </a:solidFill>
+          </a:ln>
+        </p:spPr>
+      </p:cxnSp>
+      <p:sp>
+        <p:nvSpPr>
+          <p:cNvPr id="33" name="텍스트"/>
           <p:cNvSpPr txBox="1"/>
           <p:nvPr/>
         </p:nvSpPr>
         <p:spPr>
           <a:xfrm>
-            <a:off x="1584000" y="36000"/>
-            <a:ext cx="1656000" cy="1728000"/>
-          </a:xfrm>
-          <a:prstGeom prst="rect">
-            <a:avLst/>
-          </a:prstGeom>
-          <a:noFill/>
-        </p:spPr>
-        <p:txBody>
-          <a:bodyPr wrap="square" lIns="0" rIns="0" tIns="0" bIns="0" anchor="ctr">
-            <a:spAutoFit/>
-          </a:bodyPr>
-          <a:lstStyle/>
-          <a:p>
-            <a:pPr algn="ctr">
-              <a:lnSpc>
-                <a:spcPts val="18560"/>
-              </a:lnSpc>
-            </a:pPr>
-            <a:r>
-              <a:rPr sz="12800" b="1">
-                <a:solidFill>
-                  <a:srgbClr val="FFF1EA"/>
-                </a:solidFill>
-                <a:latin typeface="맑은 고딕"/>
-                <a:ea typeface="맑은 고딕"/>
-              </a:rPr>
-              <a:t>황</a:t>
-            </a:r>
-          </a:p>
-        </p:txBody>
-      </p:sp>
-      <p:sp>
-        <p:nvSpPr>
-          <p:cNvPr id="3" name="텍스트"/>
-          <p:cNvSpPr txBox="1"/>
-          <p:nvPr/>
-        </p:nvSpPr>
-        <p:spPr>
-          <a:xfrm>
-            <a:off x="252000" y="223200"/>
-            <a:ext cx="1440000" cy="133351"/>
+            <a:off x="252000" y="252000"/>
+            <a:ext cx="1512000" cy="123826"/>
           </a:xfrm>
           <a:prstGeom prst="rect">
             <a:avLst/>
@@ -3161,11 +3780,11 @@
           <a:p>
             <a:pPr algn="l">
               <a:lnSpc>
-                <a:spcPts val="1015"/>
+                <a:spcPts val="942"/>
               </a:lnSpc>
             </a:pPr>
             <a:r>
-              <a:rPr sz="700" b="1" spc="200">
+              <a:rPr sz="650" b="1" spc="220">
                 <a:solidFill>
                   <a:srgbClr val="6B7280"/>
                 </a:solidFill>
@@ -3177,16 +3796,37 @@
           </a:p>
         </p:txBody>
       </p:sp>
-      <p:sp>
-        <p:nvSpPr>
-          <p:cNvPr id="4" name="텍스트"/>
+      <p:cxnSp>
+        <p:nvCxnSpPr>
+          <p:cNvPr id="34" name="Connector 33"/>
+          <p:cNvCxnSpPr/>
+          <p:nvPr/>
+        </p:nvCxnSpPr>
+        <p:spPr>
+          <a:xfrm>
+            <a:off x="252000" y="374400"/>
+            <a:ext cx="1548000" cy="0"/>
+          </a:xfrm>
+          <a:prstGeom prst="line">
+            <a:avLst/>
+          </a:prstGeom>
+          <a:ln w="3600">
+            <a:solidFill>
+              <a:srgbClr val="E3E5E9"/>
+            </a:solidFill>
+          </a:ln>
+        </p:spPr>
+      </p:cxnSp>
+      <p:sp>
+        <p:nvSpPr>
+          <p:cNvPr id="35" name="텍스트"/>
           <p:cNvSpPr txBox="1"/>
           <p:nvPr/>
         </p:nvSpPr>
         <p:spPr>
           <a:xfrm>
-            <a:off x="252000" y="604800"/>
-            <a:ext cx="1656000" cy="360000"/>
+            <a:off x="252000" y="676800"/>
+            <a:ext cx="1800000" cy="237600"/>
           </a:xfrm>
           <a:prstGeom prst="rect">
             <a:avLst/>
@@ -3201,11 +3841,11 @@
           <a:p>
             <a:pPr algn="l">
               <a:lnSpc>
-                <a:spcPts val="3190"/>
+                <a:spcPts val="1957"/>
               </a:lnSpc>
             </a:pPr>
             <a:r>
-              <a:rPr sz="2200" b="1">
+              <a:rPr sz="1350" b="1" spc="120">
                 <a:solidFill>
                   <a:srgbClr val="12151C"/>
                 </a:solidFill>
@@ -3219,14 +3859,14 @@
       </p:sp>
       <p:sp>
         <p:nvSpPr>
-          <p:cNvPr id="5" name="텍스트"/>
+          <p:cNvPr id="36" name="텍스트"/>
           <p:cNvSpPr txBox="1"/>
           <p:nvPr/>
         </p:nvSpPr>
         <p:spPr>
           <a:xfrm>
-            <a:off x="252000" y="1008000"/>
-            <a:ext cx="1656000" cy="171451"/>
+            <a:off x="252000" y="928800"/>
+            <a:ext cx="1800000" cy="133351"/>
           </a:xfrm>
           <a:prstGeom prst="rect">
             <a:avLst/>
@@ -3241,11 +3881,11 @@
           <a:p>
             <a:pPr algn="l">
               <a:lnSpc>
-                <a:spcPts val="1305"/>
+                <a:spcPts val="1015"/>
               </a:lnSpc>
             </a:pPr>
             <a:r>
-              <a:rPr sz="900" b="0">
+              <a:rPr sz="700" b="0" spc="60">
                 <a:solidFill>
                   <a:srgbClr val="6B7280"/>
                 </a:solidFill>
@@ -3259,43 +3899,14 @@
       </p:sp>
       <p:sp>
         <p:nvSpPr>
-          <p:cNvPr id="6" name="Rectangle 5"/>
-          <p:cNvSpPr/>
-          <p:nvPr/>
-        </p:nvSpPr>
-        <p:spPr>
-          <a:xfrm>
-            <a:off x="252000" y="1231200"/>
-            <a:ext cx="144000" cy="18000"/>
-          </a:xfrm>
-          <a:prstGeom prst="rect">
-            <a:avLst/>
-          </a:prstGeom>
-          <a:solidFill>
-            <a:srgbClr val="FF9E6B"/>
-          </a:solidFill>
-          <a:ln>
-            <a:noFill/>
-          </a:ln>
-        </p:spPr>
-        <p:txBody>
-          <a:bodyPr rtlCol="0" anchor="ctr"/>
-          <a:lstStyle/>
-          <a:p>
-            <a:pPr algn="ctr"/>
-          </a:p>
-        </p:txBody>
-      </p:sp>
-      <p:sp>
-        <p:nvSpPr>
-          <p:cNvPr id="7" name="텍스트"/>
+          <p:cNvPr id="37" name="텍스트"/>
           <p:cNvSpPr txBox="1"/>
           <p:nvPr/>
         </p:nvSpPr>
         <p:spPr>
           <a:xfrm>
-            <a:off x="252000" y="1350000"/>
-            <a:ext cx="331200" cy="99061"/>
+            <a:off x="252000" y="1339200"/>
+            <a:ext cx="900000" cy="91441"/>
           </a:xfrm>
           <a:prstGeom prst="rect">
             <a:avLst/>
@@ -3310,11 +3921,11 @@
           <a:p>
             <a:pPr algn="l">
               <a:lnSpc>
-                <a:spcPts val="754"/>
+                <a:spcPts val="696"/>
               </a:lnSpc>
             </a:pPr>
             <a:r>
-              <a:rPr sz="520" b="1" spc="120">
+              <a:rPr sz="480" b="1" spc="140">
                 <a:solidFill>
                   <a:srgbClr val="6B7280"/>
                 </a:solidFill>
@@ -3328,14 +3939,14 @@
       </p:sp>
       <p:sp>
         <p:nvSpPr>
-          <p:cNvPr id="8" name="텍스트"/>
+          <p:cNvPr id="38" name="텍스트"/>
           <p:cNvSpPr txBox="1"/>
           <p:nvPr/>
         </p:nvSpPr>
         <p:spPr>
           <a:xfrm>
-            <a:off x="583200" y="1339200"/>
-            <a:ext cx="1296000" cy="129541"/>
+            <a:off x="252000" y="1440000"/>
+            <a:ext cx="900000" cy="123826"/>
           </a:xfrm>
           <a:prstGeom prst="rect">
             <a:avLst/>
@@ -3350,11 +3961,11 @@
           <a:p>
             <a:pPr algn="l">
               <a:lnSpc>
-                <a:spcPts val="986"/>
+                <a:spcPts val="942"/>
               </a:lnSpc>
             </a:pPr>
             <a:r>
-              <a:rPr sz="680" b="0">
+              <a:rPr sz="650" b="0">
                 <a:solidFill>
                   <a:srgbClr val="12151C"/>
                 </a:solidFill>
@@ -3366,16 +3977,37 @@
           </a:p>
         </p:txBody>
       </p:sp>
-      <p:sp>
-        <p:nvSpPr>
-          <p:cNvPr id="9" name="텍스트"/>
+      <p:cxnSp>
+        <p:nvCxnSpPr>
+          <p:cNvPr id="39" name="Connector 38"/>
+          <p:cNvCxnSpPr/>
+          <p:nvPr/>
+        </p:nvCxnSpPr>
+        <p:spPr>
+          <a:xfrm>
+            <a:off x="1072800" y="1339200"/>
+            <a:ext cx="0" cy="201600"/>
+          </a:xfrm>
+          <a:prstGeom prst="line">
+            <a:avLst/>
+          </a:prstGeom>
+          <a:ln w="3600">
+            <a:solidFill>
+              <a:srgbClr val="E3E5E9"/>
+            </a:solidFill>
+          </a:ln>
+        </p:spPr>
+      </p:cxnSp>
+      <p:sp>
+        <p:nvSpPr>
+          <p:cNvPr id="40" name="텍스트"/>
           <p:cNvSpPr txBox="1"/>
           <p:nvPr/>
         </p:nvSpPr>
         <p:spPr>
           <a:xfrm>
-            <a:off x="252000" y="1472400"/>
-            <a:ext cx="331200" cy="99061"/>
+            <a:off x="1152000" y="1339200"/>
+            <a:ext cx="972000" cy="91441"/>
           </a:xfrm>
           <a:prstGeom prst="rect">
             <a:avLst/>
@@ -3390,11 +4022,11 @@
           <a:p>
             <a:pPr algn="l">
               <a:lnSpc>
-                <a:spcPts val="754"/>
+                <a:spcPts val="696"/>
               </a:lnSpc>
             </a:pPr>
             <a:r>
-              <a:rPr sz="520" b="1" spc="120">
+              <a:rPr sz="480" b="1" spc="140">
                 <a:solidFill>
                   <a:srgbClr val="6B7280"/>
                 </a:solidFill>
@@ -3408,14 +4040,14 @@
       </p:sp>
       <p:sp>
         <p:nvSpPr>
-          <p:cNvPr id="10" name="텍스트"/>
+          <p:cNvPr id="41" name="텍스트"/>
           <p:cNvSpPr txBox="1"/>
           <p:nvPr/>
         </p:nvSpPr>
         <p:spPr>
           <a:xfrm>
-            <a:off x="583200" y="1461600"/>
-            <a:ext cx="1296000" cy="129541"/>
+            <a:off x="1152000" y="1440000"/>
+            <a:ext cx="972000" cy="123826"/>
           </a:xfrm>
           <a:prstGeom prst="rect">
             <a:avLst/>
@@ -3430,11 +4062,11 @@
           <a:p>
             <a:pPr algn="l">
               <a:lnSpc>
-                <a:spcPts val="986"/>
+                <a:spcPts val="942"/>
               </a:lnSpc>
             </a:pPr>
             <a:r>
-              <a:rPr sz="680" b="0">
+              <a:rPr sz="650" b="0">
                 <a:solidFill>
                   <a:srgbClr val="12151C"/>
                 </a:solidFill>
@@ -3446,16 +4078,37 @@
           </a:p>
         </p:txBody>
       </p:sp>
-      <p:sp>
-        <p:nvSpPr>
-          <p:cNvPr id="11" name="텍스트"/>
+      <p:cxnSp>
+        <p:nvCxnSpPr>
+          <p:cNvPr id="42" name="Connector 41"/>
+          <p:cNvCxnSpPr/>
+          <p:nvPr/>
+        </p:nvCxnSpPr>
+        <p:spPr>
+          <a:xfrm>
+            <a:off x="2044800" y="1339200"/>
+            <a:ext cx="0" cy="201600"/>
+          </a:xfrm>
+          <a:prstGeom prst="line">
+            <a:avLst/>
+          </a:prstGeom>
+          <a:ln w="3600">
+            <a:solidFill>
+              <a:srgbClr val="E3E5E9"/>
+            </a:solidFill>
+          </a:ln>
+        </p:spPr>
+      </p:cxnSp>
+      <p:sp>
+        <p:nvSpPr>
+          <p:cNvPr id="43" name="텍스트"/>
           <p:cNvSpPr txBox="1"/>
           <p:nvPr/>
         </p:nvSpPr>
         <p:spPr>
           <a:xfrm>
-            <a:off x="252000" y="1594800"/>
-            <a:ext cx="331200" cy="99061"/>
+            <a:off x="2124000" y="1339200"/>
+            <a:ext cx="972000" cy="91441"/>
           </a:xfrm>
           <a:prstGeom prst="rect">
             <a:avLst/>
@@ -3470,11 +4123,11 @@
           <a:p>
             <a:pPr algn="l">
               <a:lnSpc>
-                <a:spcPts val="754"/>
+                <a:spcPts val="696"/>
               </a:lnSpc>
             </a:pPr>
             <a:r>
-              <a:rPr sz="520" b="1" spc="120">
+              <a:rPr sz="480" b="1" spc="140">
                 <a:solidFill>
                   <a:srgbClr val="6B7280"/>
                 </a:solidFill>
@@ -3488,14 +4141,14 @@
       </p:sp>
       <p:sp>
         <p:nvSpPr>
-          <p:cNvPr id="12" name="텍스트"/>
+          <p:cNvPr id="44" name="텍스트"/>
           <p:cNvSpPr txBox="1"/>
           <p:nvPr/>
         </p:nvSpPr>
         <p:spPr>
           <a:xfrm>
-            <a:off x="583200" y="1584000"/>
-            <a:ext cx="1296000" cy="129541"/>
+            <a:off x="2124000" y="1440000"/>
+            <a:ext cx="972000" cy="123826"/>
           </a:xfrm>
           <a:prstGeom prst="rect">
             <a:avLst/>
@@ -3510,11 +4163,11 @@
           <a:p>
             <a:pPr algn="l">
               <a:lnSpc>
-                <a:spcPts val="986"/>
+                <a:spcPts val="942"/>
               </a:lnSpc>
             </a:pPr>
             <a:r>
-              <a:rPr sz="680" b="0">
+              <a:rPr sz="650" b="0">
                 <a:solidFill>
                   <a:srgbClr val="12151C"/>
                 </a:solidFill>
@@ -3552,248 +4205,184 @@
         <p:nvPr/>
       </p:nvGrpSpPr>
       <p:grpSpPr/>
-      <p:sp>
-        <p:nvSpPr>
-          <p:cNvPr id="2" name="Freeform 1"/>
-          <p:cNvSpPr/>
-          <p:nvPr/>
-        </p:nvSpPr>
-        <p:spPr>
-          <a:xfrm>
-            <a:off x="0" y="0"/>
-            <a:ext cx="1080000" cy="1080000"/>
-          </a:xfrm>
-          <a:custGeom>
-            <a:avLst/>
-            <a:gdLst/>
-            <a:ahLst/>
-            <a:cxnLst/>
-            <a:rect l="l" t="t" r="r" b="b"/>
-            <a:pathLst>
-              <a:path w="1080000" h="1080000">
-                <a:moveTo>
-                  <a:pt x="0" y="0"/>
-                </a:moveTo>
-                <a:lnTo>
-                  <a:pt x="1080000" y="0"/>
-                </a:lnTo>
-                <a:lnTo>
-                  <a:pt x="1077688" y="70635"/>
-                </a:lnTo>
-                <a:lnTo>
-                  <a:pt x="1070760" y="140968"/>
-                </a:lnTo>
-                <a:lnTo>
-                  <a:pt x="1059248" y="210698"/>
-                </a:lnTo>
-                <a:lnTo>
-                  <a:pt x="1043200" y="279525"/>
-                </a:lnTo>
-                <a:lnTo>
-                  <a:pt x="1022685" y="347155"/>
-                </a:lnTo>
-                <a:lnTo>
-                  <a:pt x="997790" y="413298"/>
-                </a:lnTo>
-                <a:lnTo>
-                  <a:pt x="968623" y="477672"/>
-                </a:lnTo>
-                <a:lnTo>
-                  <a:pt x="935307" y="540000"/>
-                </a:lnTo>
-                <a:lnTo>
-                  <a:pt x="897987" y="600016"/>
-                </a:lnTo>
-                <a:lnTo>
-                  <a:pt x="856822" y="657462"/>
-                </a:lnTo>
-                <a:lnTo>
-                  <a:pt x="811987" y="712093"/>
-                </a:lnTo>
-                <a:lnTo>
-                  <a:pt x="763675" y="763675"/>
-                </a:lnTo>
-                <a:lnTo>
-                  <a:pt x="712093" y="811987"/>
-                </a:lnTo>
-                <a:lnTo>
-                  <a:pt x="657462" y="856822"/>
-                </a:lnTo>
-                <a:lnTo>
-                  <a:pt x="600016" y="897987"/>
-                </a:lnTo>
-                <a:lnTo>
-                  <a:pt x="540000" y="935307"/>
-                </a:lnTo>
-                <a:lnTo>
-                  <a:pt x="477672" y="968623"/>
-                </a:lnTo>
-                <a:lnTo>
-                  <a:pt x="413298" y="997790"/>
-                </a:lnTo>
-                <a:lnTo>
-                  <a:pt x="347155" y="1022685"/>
-                </a:lnTo>
-                <a:lnTo>
-                  <a:pt x="279525" y="1043200"/>
-                </a:lnTo>
-                <a:lnTo>
-                  <a:pt x="210698" y="1059248"/>
-                </a:lnTo>
-                <a:lnTo>
-                  <a:pt x="140968" y="1070760"/>
-                </a:lnTo>
-                <a:lnTo>
-                  <a:pt x="70635" y="1077688"/>
-                </a:lnTo>
-                <a:lnTo>
-                  <a:pt x="0" y="1080000"/>
-                </a:lnTo>
-                <a:close/>
-              </a:path>
-            </a:pathLst>
-          </a:custGeom>
-          <a:solidFill>
-            <a:srgbClr val="FF9E6B"/>
-          </a:solidFill>
-          <a:ln>
-            <a:noFill/>
+      <p:cxnSp>
+        <p:nvCxnSpPr>
+          <p:cNvPr id="2" name="Connector 1"/>
+          <p:cNvCxnSpPr/>
+          <p:nvPr/>
+        </p:nvCxnSpPr>
+        <p:spPr>
+          <a:xfrm>
+            <a:off x="79200" y="108000"/>
+            <a:ext cx="57600" cy="0"/>
+          </a:xfrm>
+          <a:prstGeom prst="line">
+            <a:avLst/>
+          </a:prstGeom>
+          <a:ln w="3600">
+            <a:solidFill>
+              <a:srgbClr val="DCDFE4"/>
+            </a:solidFill>
           </a:ln>
         </p:spPr>
-        <p:txBody>
-          <a:bodyPr rtlCol="0" anchor="ctr"/>
-          <a:lstStyle/>
-          <a:p>
-            <a:pPr algn="ctr"/>
-          </a:p>
-        </p:txBody>
-      </p:sp>
-      <p:sp>
-        <p:nvSpPr>
-          <p:cNvPr id="3" name="Freeform 2"/>
-          <p:cNvSpPr/>
-          <p:nvPr/>
-        </p:nvSpPr>
-        <p:spPr>
-          <a:xfrm>
-            <a:off x="0" y="0"/>
-            <a:ext cx="684000" cy="684000"/>
-          </a:xfrm>
-          <a:custGeom>
-            <a:avLst/>
-            <a:gdLst/>
-            <a:ahLst/>
-            <a:cxnLst/>
-            <a:rect l="l" t="t" r="r" b="b"/>
-            <a:pathLst>
-              <a:path w="684000" h="684000">
-                <a:moveTo>
-                  <a:pt x="0" y="0"/>
-                </a:moveTo>
-                <a:lnTo>
-                  <a:pt x="684000" y="0"/>
-                </a:lnTo>
-                <a:lnTo>
-                  <a:pt x="682536" y="44736"/>
-                </a:lnTo>
-                <a:lnTo>
-                  <a:pt x="678148" y="89280"/>
-                </a:lnTo>
-                <a:lnTo>
-                  <a:pt x="670857" y="133442"/>
-                </a:lnTo>
-                <a:lnTo>
-                  <a:pt x="660693" y="177032"/>
-                </a:lnTo>
-                <a:lnTo>
-                  <a:pt x="647700" y="219865"/>
-                </a:lnTo>
-                <a:lnTo>
-                  <a:pt x="631934" y="261755"/>
-                </a:lnTo>
-                <a:lnTo>
-                  <a:pt x="613461" y="302525"/>
-                </a:lnTo>
-                <a:lnTo>
-                  <a:pt x="592361" y="342000"/>
-                </a:lnTo>
-                <a:lnTo>
-                  <a:pt x="568725" y="380010"/>
-                </a:lnTo>
-                <a:lnTo>
-                  <a:pt x="542654" y="416393"/>
-                </a:lnTo>
-                <a:lnTo>
-                  <a:pt x="514258" y="450993"/>
-                </a:lnTo>
-                <a:lnTo>
-                  <a:pt x="483661" y="483661"/>
-                </a:lnTo>
-                <a:lnTo>
-                  <a:pt x="450993" y="514258"/>
-                </a:lnTo>
-                <a:lnTo>
-                  <a:pt x="416393" y="542654"/>
-                </a:lnTo>
-                <a:lnTo>
-                  <a:pt x="380010" y="568725"/>
-                </a:lnTo>
-                <a:lnTo>
-                  <a:pt x="342000" y="592361"/>
-                </a:lnTo>
-                <a:lnTo>
-                  <a:pt x="302525" y="613461"/>
-                </a:lnTo>
-                <a:lnTo>
-                  <a:pt x="261755" y="631934"/>
-                </a:lnTo>
-                <a:lnTo>
-                  <a:pt x="219865" y="647700"/>
-                </a:lnTo>
-                <a:lnTo>
-                  <a:pt x="177032" y="660693"/>
-                </a:lnTo>
-                <a:lnTo>
-                  <a:pt x="133442" y="670857"/>
-                </a:lnTo>
-                <a:lnTo>
-                  <a:pt x="89280" y="678148"/>
-                </a:lnTo>
-                <a:lnTo>
-                  <a:pt x="44736" y="682536"/>
-                </a:lnTo>
-                <a:lnTo>
-                  <a:pt x="0" y="684000"/>
-                </a:lnTo>
-                <a:close/>
-              </a:path>
-            </a:pathLst>
-          </a:custGeom>
-          <a:solidFill>
-            <a:srgbClr val="F5E8E3"/>
-          </a:solidFill>
-          <a:ln>
-            <a:noFill/>
+      </p:cxnSp>
+      <p:cxnSp>
+        <p:nvCxnSpPr>
+          <p:cNvPr id="3" name="Connector 2"/>
+          <p:cNvCxnSpPr/>
+          <p:nvPr/>
+        </p:nvCxnSpPr>
+        <p:spPr>
+          <a:xfrm>
+            <a:off x="108000" y="79200"/>
+            <a:ext cx="0" cy="57600"/>
+          </a:xfrm>
+          <a:prstGeom prst="line">
+            <a:avLst/>
+          </a:prstGeom>
+          <a:ln w="3600">
+            <a:solidFill>
+              <a:srgbClr val="DCDFE4"/>
+            </a:solidFill>
           </a:ln>
         </p:spPr>
-        <p:txBody>
-          <a:bodyPr rtlCol="0" anchor="ctr"/>
-          <a:lstStyle/>
-          <a:p>
-            <a:pPr algn="ctr"/>
-          </a:p>
-        </p:txBody>
-      </p:sp>
-      <p:sp>
-        <p:nvSpPr>
-          <p:cNvPr id="4" name="텍스트"/>
+      </p:cxnSp>
+      <p:cxnSp>
+        <p:nvCxnSpPr>
+          <p:cNvPr id="4" name="Connector 3"/>
+          <p:cNvCxnSpPr/>
+          <p:nvPr/>
+        </p:nvCxnSpPr>
+        <p:spPr>
+          <a:xfrm>
+            <a:off x="3103200" y="108000"/>
+            <a:ext cx="57600" cy="0"/>
+          </a:xfrm>
+          <a:prstGeom prst="line">
+            <a:avLst/>
+          </a:prstGeom>
+          <a:ln w="3600">
+            <a:solidFill>
+              <a:srgbClr val="DCDFE4"/>
+            </a:solidFill>
+          </a:ln>
+        </p:spPr>
+      </p:cxnSp>
+      <p:cxnSp>
+        <p:nvCxnSpPr>
+          <p:cNvPr id="5" name="Connector 4"/>
+          <p:cNvCxnSpPr/>
+          <p:nvPr/>
+        </p:nvCxnSpPr>
+        <p:spPr>
+          <a:xfrm>
+            <a:off x="3132000" y="79200"/>
+            <a:ext cx="0" cy="57600"/>
+          </a:xfrm>
+          <a:prstGeom prst="line">
+            <a:avLst/>
+          </a:prstGeom>
+          <a:ln w="3600">
+            <a:solidFill>
+              <a:srgbClr val="DCDFE4"/>
+            </a:solidFill>
+          </a:ln>
+        </p:spPr>
+      </p:cxnSp>
+      <p:cxnSp>
+        <p:nvCxnSpPr>
+          <p:cNvPr id="6" name="Connector 5"/>
+          <p:cNvCxnSpPr/>
+          <p:nvPr/>
+        </p:nvCxnSpPr>
+        <p:spPr>
+          <a:xfrm>
+            <a:off x="79200" y="1692000"/>
+            <a:ext cx="57600" cy="0"/>
+          </a:xfrm>
+          <a:prstGeom prst="line">
+            <a:avLst/>
+          </a:prstGeom>
+          <a:ln w="3600">
+            <a:solidFill>
+              <a:srgbClr val="DCDFE4"/>
+            </a:solidFill>
+          </a:ln>
+        </p:spPr>
+      </p:cxnSp>
+      <p:cxnSp>
+        <p:nvCxnSpPr>
+          <p:cNvPr id="7" name="Connector 6"/>
+          <p:cNvCxnSpPr/>
+          <p:nvPr/>
+        </p:nvCxnSpPr>
+        <p:spPr>
+          <a:xfrm>
+            <a:off x="108000" y="1663200"/>
+            <a:ext cx="0" cy="57600"/>
+          </a:xfrm>
+          <a:prstGeom prst="line">
+            <a:avLst/>
+          </a:prstGeom>
+          <a:ln w="3600">
+            <a:solidFill>
+              <a:srgbClr val="DCDFE4"/>
+            </a:solidFill>
+          </a:ln>
+        </p:spPr>
+      </p:cxnSp>
+      <p:cxnSp>
+        <p:nvCxnSpPr>
+          <p:cNvPr id="8" name="Connector 7"/>
+          <p:cNvCxnSpPr/>
+          <p:nvPr/>
+        </p:nvCxnSpPr>
+        <p:spPr>
+          <a:xfrm>
+            <a:off x="3103200" y="1692000"/>
+            <a:ext cx="57600" cy="0"/>
+          </a:xfrm>
+          <a:prstGeom prst="line">
+            <a:avLst/>
+          </a:prstGeom>
+          <a:ln w="3600">
+            <a:solidFill>
+              <a:srgbClr val="DCDFE4"/>
+            </a:solidFill>
+          </a:ln>
+        </p:spPr>
+      </p:cxnSp>
+      <p:cxnSp>
+        <p:nvCxnSpPr>
+          <p:cNvPr id="9" name="Connector 8"/>
+          <p:cNvCxnSpPr/>
+          <p:nvPr/>
+        </p:nvCxnSpPr>
+        <p:spPr>
+          <a:xfrm>
+            <a:off x="3132000" y="1663200"/>
+            <a:ext cx="0" cy="57600"/>
+          </a:xfrm>
+          <a:prstGeom prst="line">
+            <a:avLst/>
+          </a:prstGeom>
+          <a:ln w="3600">
+            <a:solidFill>
+              <a:srgbClr val="DCDFE4"/>
+            </a:solidFill>
+          </a:ln>
+        </p:spPr>
+      </p:cxnSp>
+      <p:sp>
+        <p:nvSpPr>
+          <p:cNvPr id="10" name="텍스트"/>
           <p:cNvSpPr txBox="1"/>
           <p:nvPr/>
         </p:nvSpPr>
         <p:spPr>
           <a:xfrm>
-            <a:off x="1188000" y="1044000"/>
-            <a:ext cx="1800000" cy="432000"/>
+            <a:off x="252000" y="288000"/>
+            <a:ext cx="2520000" cy="123826"/>
           </a:xfrm>
           <a:prstGeom prst="rect">
             <a:avLst/>
@@ -3806,70 +4395,13 @@
           </a:bodyPr>
           <a:lstStyle/>
           <a:p>
-            <a:pPr algn="r">
-              <a:lnSpc>
-                <a:spcPts val="1739"/>
-              </a:lnSpc>
-            </a:pPr>
-            <a:r>
-              <a:rPr sz="1200" b="1">
-                <a:solidFill>
-                  <a:srgbClr val="12151C"/>
-                </a:solidFill>
-                <a:latin typeface="맑은 고딕"/>
-                <a:ea typeface="맑은 고딕"/>
-              </a:rPr>
-              <a:t>첫 스케치의 설렘을</a:t>
-            </a:r>
-          </a:p>
-          <a:p>
-            <a:pPr algn="r">
-              <a:lnSpc>
-                <a:spcPts val="1739"/>
-              </a:lnSpc>
-            </a:pPr>
-            <a:r>
-              <a:rPr sz="1200" b="1">
-                <a:solidFill>
-                  <a:srgbClr val="12151C"/>
-                </a:solidFill>
-                <a:latin typeface="맑은 고딕"/>
-                <a:ea typeface="맑은 고딕"/>
-              </a:rPr>
-              <a:t>잊지 않습니다</a:t>
-            </a:r>
-          </a:p>
-        </p:txBody>
-      </p:sp>
-      <p:sp>
-        <p:nvSpPr>
-          <p:cNvPr id="5" name="텍스트"/>
-          <p:cNvSpPr txBox="1"/>
-          <p:nvPr/>
-        </p:nvSpPr>
-        <p:spPr>
-          <a:xfrm>
-            <a:off x="1188000" y="1526400"/>
-            <a:ext cx="1800000" cy="123826"/>
-          </a:xfrm>
-          <a:prstGeom prst="rect">
-            <a:avLst/>
-          </a:prstGeom>
-          <a:noFill/>
-        </p:spPr>
-        <p:txBody>
-          <a:bodyPr wrap="square" lIns="0" rIns="0" tIns="0" bIns="0" anchor="t">
-            <a:spAutoFit/>
-          </a:bodyPr>
-          <a:lstStyle/>
-          <a:p>
-            <a:pPr algn="r">
+            <a:pPr algn="ctr">
               <a:lnSpc>
                 <a:spcPts val="942"/>
               </a:lnSpc>
             </a:pPr>
             <a:r>
-              <a:rPr sz="650" b="1" spc="200">
+              <a:rPr sz="650" b="1" spc="220">
                 <a:solidFill>
                   <a:srgbClr val="6B7280"/>
                 </a:solidFill>
@@ -3877,6 +4409,237 @@
                 <a:ea typeface="맑은 고딕"/>
               </a:rPr>
               <a:t>스튜디오 이름</a:t>
+            </a:r>
+          </a:p>
+        </p:txBody>
+      </p:sp>
+      <p:sp>
+        <p:nvSpPr>
+          <p:cNvPr id="11" name="Rectangle 10"/>
+          <p:cNvSpPr/>
+          <p:nvPr/>
+        </p:nvSpPr>
+        <p:spPr>
+          <a:xfrm>
+            <a:off x="1530000" y="453600"/>
+            <a:ext cx="180000" cy="14400"/>
+          </a:xfrm>
+          <a:prstGeom prst="rect">
+            <a:avLst/>
+          </a:prstGeom>
+          <a:solidFill>
+            <a:srgbClr val="FF9E6B"/>
+          </a:solidFill>
+          <a:ln>
+            <a:noFill/>
+          </a:ln>
+        </p:spPr>
+        <p:txBody>
+          <a:bodyPr rtlCol="0" anchor="ctr"/>
+          <a:lstStyle/>
+          <a:p>
+            <a:pPr algn="ctr"/>
+          </a:p>
+        </p:txBody>
+      </p:sp>
+      <p:sp>
+        <p:nvSpPr>
+          <p:cNvPr id="12" name="텍스트"/>
+          <p:cNvSpPr txBox="1"/>
+          <p:nvPr/>
+        </p:nvSpPr>
+        <p:spPr>
+          <a:xfrm>
+            <a:off x="360000" y="619200"/>
+            <a:ext cx="2520000" cy="99061"/>
+          </a:xfrm>
+          <a:prstGeom prst="rect">
+            <a:avLst/>
+          </a:prstGeom>
+          <a:noFill/>
+        </p:spPr>
+        <p:txBody>
+          <a:bodyPr wrap="square" lIns="0" rIns="0" tIns="0" bIns="0" anchor="t">
+            <a:spAutoFit/>
+          </a:bodyPr>
+          <a:lstStyle/>
+          <a:p>
+            <a:pPr algn="ctr">
+              <a:lnSpc>
+                <a:spcPts val="754"/>
+              </a:lnSpc>
+            </a:pPr>
+            <a:r>
+              <a:rPr sz="520" b="1" spc="240">
+                <a:solidFill>
+                  <a:srgbClr val="6B7280"/>
+                </a:solidFill>
+                <a:latin typeface="맑은 고딕"/>
+                <a:ea typeface="맑은 고딕"/>
+              </a:rPr>
+              <a:t>작업 분야</a:t>
+            </a:r>
+          </a:p>
+        </p:txBody>
+      </p:sp>
+      <p:sp>
+        <p:nvSpPr>
+          <p:cNvPr id="13" name="텍스트"/>
+          <p:cNvSpPr txBox="1"/>
+          <p:nvPr/>
+        </p:nvSpPr>
+        <p:spPr>
+          <a:xfrm>
+            <a:off x="360000" y="741600"/>
+            <a:ext cx="2520000" cy="396000"/>
+          </a:xfrm>
+          <a:prstGeom prst="rect">
+            <a:avLst/>
+          </a:prstGeom>
+          <a:noFill/>
+        </p:spPr>
+        <p:txBody>
+          <a:bodyPr wrap="square" lIns="0" rIns="0" tIns="0" bIns="0" anchor="t">
+            <a:spAutoFit/>
+          </a:bodyPr>
+          <a:lstStyle/>
+          <a:p>
+            <a:pPr algn="ctr">
+              <a:lnSpc>
+                <a:spcPts val="1188"/>
+              </a:lnSpc>
+            </a:pPr>
+            <a:r>
+              <a:rPr sz="819" b="1">
+                <a:solidFill>
+                  <a:srgbClr val="12151C"/>
+                </a:solidFill>
+                <a:latin typeface="맑은 고딕"/>
+                <a:ea typeface="맑은 고딕"/>
+              </a:rPr>
+              <a:t>브랜딩  ·  웹툰  ·  영상 편집  ·  모션 그래픽</a:t>
+            </a:r>
+          </a:p>
+        </p:txBody>
+      </p:sp>
+      <p:cxnSp>
+        <p:nvCxnSpPr>
+          <p:cNvPr id="14" name="Connector 13"/>
+          <p:cNvCxnSpPr/>
+          <p:nvPr/>
+        </p:nvCxnSpPr>
+        <p:spPr>
+          <a:xfrm>
+            <a:off x="360000" y="1224000"/>
+            <a:ext cx="2520000" cy="0"/>
+          </a:xfrm>
+          <a:prstGeom prst="line">
+            <a:avLst/>
+          </a:prstGeom>
+          <a:ln w="3600">
+            <a:solidFill>
+              <a:srgbClr val="DCDFE4"/>
+            </a:solidFill>
+          </a:ln>
+        </p:spPr>
+      </p:cxnSp>
+      <p:sp>
+        <p:nvSpPr>
+          <p:cNvPr id="15" name="텍스트"/>
+          <p:cNvSpPr txBox="1"/>
+          <p:nvPr/>
+        </p:nvSpPr>
+        <p:spPr>
+          <a:xfrm>
+            <a:off x="360000" y="1317600"/>
+            <a:ext cx="1224000" cy="118111"/>
+          </a:xfrm>
+          <a:prstGeom prst="rect">
+            <a:avLst/>
+          </a:prstGeom>
+          <a:noFill/>
+        </p:spPr>
+        <p:txBody>
+          <a:bodyPr wrap="square" lIns="0" rIns="0" tIns="0" bIns="0" anchor="t">
+            <a:spAutoFit/>
+          </a:bodyPr>
+          <a:lstStyle/>
+          <a:p>
+            <a:pPr algn="ctr">
+              <a:lnSpc>
+                <a:spcPts val="899"/>
+              </a:lnSpc>
+            </a:pPr>
+            <a:r>
+              <a:rPr sz="620" b="0">
+                <a:solidFill>
+                  <a:srgbClr val="12151C"/>
+                </a:solidFill>
+                <a:latin typeface="맑은 고딕"/>
+                <a:ea typeface="맑은 고딕"/>
+              </a:rPr>
+              <a:t>메일 · 메시지 문의</a:t>
+            </a:r>
+          </a:p>
+        </p:txBody>
+      </p:sp>
+      <p:cxnSp>
+        <p:nvCxnSpPr>
+          <p:cNvPr id="16" name="Connector 15"/>
+          <p:cNvCxnSpPr/>
+          <p:nvPr/>
+        </p:nvCxnSpPr>
+        <p:spPr>
+          <a:xfrm>
+            <a:off x="1620000" y="1296000"/>
+            <a:ext cx="0" cy="180000"/>
+          </a:xfrm>
+          <a:prstGeom prst="line">
+            <a:avLst/>
+          </a:prstGeom>
+          <a:ln w="3600">
+            <a:solidFill>
+              <a:srgbClr val="DCDFE4"/>
+            </a:solidFill>
+          </a:ln>
+        </p:spPr>
+      </p:cxnSp>
+      <p:sp>
+        <p:nvSpPr>
+          <p:cNvPr id="17" name="텍스트"/>
+          <p:cNvSpPr txBox="1"/>
+          <p:nvPr/>
+        </p:nvSpPr>
+        <p:spPr>
+          <a:xfrm>
+            <a:off x="1656000" y="1317600"/>
+            <a:ext cx="1224000" cy="118111"/>
+          </a:xfrm>
+          <a:prstGeom prst="rect">
+            <a:avLst/>
+          </a:prstGeom>
+          <a:noFill/>
+        </p:spPr>
+        <p:txBody>
+          <a:bodyPr wrap="square" lIns="0" rIns="0" tIns="0" bIns="0" anchor="t">
+            <a:spAutoFit/>
+          </a:bodyPr>
+          <a:lstStyle/>
+          <a:p>
+            <a:pPr algn="ctr">
+              <a:lnSpc>
+                <a:spcPts val="899"/>
+              </a:lnSpc>
+            </a:pPr>
+            <a:r>
+              <a:rPr sz="620" b="0">
+                <a:solidFill>
+                  <a:srgbClr val="12151C"/>
+                </a:solidFill>
+                <a:latin typeface="맑은 고딕"/>
+                <a:ea typeface="맑은 고딕"/>
+              </a:rPr>
+              <a:t>blog.example.com</a:t>
             </a:r>
           </a:p>
         </p:txBody>
